--- a/1_mission/5조/아람(박상현)/1주차 과제 제출 폴더/발표자료/Aramirror_발표_2026-07-04.pptx
+++ b/1_mission/5조/아람(박상현)/1주차 과제 제출 폴더/발표자료/Aramirror_발표_2026-07-04.pptx
@@ -10,6 +10,8 @@
     <p:sldId id="258" r:id="rId10"/>
     <p:sldId id="259" r:id="rId11"/>
     <p:sldId id="260" r:id="rId12"/>
+    <p:sldId id="261" r:id="rId13"/>
+    <p:sldId id="262" r:id="rId14"/>
   </p:sldIdLst>
   <p:sldSz cx="12191695" cy="6858000" type="screen4x3"/>
   <p:notesSz cx="6858000" cy="9144000"/>
@@ -506,7 +508,7 @@
           <a:lstStyle/>
           <a:p>
             <a:r>
-              <a:t>안녕하세요, 박상현입니다. 오늘 발표는 제가 만든 개인 OS '아라미러'를, 오늘 하루 어디까지 진전시켰는지에 대한 짧은 빌드 리포트입니다. 아라미러의 핵심 문장은 하나입니다 — 'AI는 나를 대신하지 않는다, 거울이 된다.' AI가 저를 대신 완성하는 게 아니라, 제 생각을 비추고 되물어서 자산으로 바꿔주는 환경을 만들고 있습니다. 5분 안에, 무엇을 만들었고 오늘 무엇을 붙였는지, 그리고 어떻게 만들었는지 핵심만 보여드리겠습니다.</a:t>
+              <a:t>안녕하세요, 박상현입니다. 오늘 발표는 제가 만든 개인 OS '아라미러' 이야기입니다. 남의 사례를 소개하는 게 아니라, 제가 왜 이걸 시작했고, 어떻게 기획했고, 만들면서 무엇에 부딪혔는지 — 온전히 제 경험을 5분 안에 말씀드리겠습니다. 핵심 문장은 하나예요. 'AI는 나를 대신하지 않는다, 거울이 된다.'</a:t>
             </a:r>
           </a:p>
         </p:txBody>
@@ -576,7 +578,7 @@
           <a:lstStyle/>
           <a:p>
             <a:r>
-              <a:t>먼저 아라미러가 뭔지 한 문장으로 말하면, 메모앱이 아니라 '생각이 자산이 되는 환경'입니다. 구조는 세 층입니다. 1층 사고 — 떠오른 생각을 텔레그램으로 그냥 던집니다. 정리도 태그도 필요 없어요, 입력 마찰이 0이어야 계속 쓰니까요. 2층 지식 — 밤마다 AI가 그 조각들을 지난 기록과 자동으로 엮어서 위키 지식으로 승격시킵니다. 3층 자산 — 그렇게 성숙한 생각이 아라미러라는 제 사이트에 글과 개발일지로 발행됩니다. 즉 던지면 알아서 엮이고 자산이 되는 루프입니다. 오늘은 이 3층 '자산' 파트를 크게 키웠습니다.</a:t>
+              <a:t>시작은 거창한 아이디어가 아니라 제 한계였습니다. 미국 출장에서 막 돌아오고 제주 주말도 제대로 못 쉰 어느 피곤한 밤, 머릿속이 NYU 발표며 스폰지클럽이며 풀어야 할 일들로 가득 차서 한계가 느껴졌어요. 그때 깨달았습니다. 한계를 넘는 건 더 버티는 게 아니라 머릿속을 비우는 거라고. 정리 안 된 채 떠다니는 생각이 제일 무겁더라고요. 노션도 보드도 태그도 며칠을 못 갔습니다. 정리하는 데 제 손이 들어가니까요. 그래서 원칙을 아예 뒤집기로 했습니다.</a:t>
             </a:r>
           </a:p>
         </p:txBody>
@@ -646,7 +648,7 @@
           <a:lstStyle/>
           <a:p>
             <a:r>
-              <a:t>오늘 붙인 핵심은 '게시판'과 '관리자 콘솔'입니다. 출발점은 오늘 오전 에이든의 이기적스폰지 공유회였어요. 그 공유회 두 번째 아젠다가 정확히 'KEY 연결로 CRUD 게시판 만들기'였고, 마침 제가 필요하던 거라 바로 적용했습니다. 결과물은 두 개입니다. 하나는 공개 게시판 슬래시 board — 카테고리로 분류하고 글을 읽습니다. 다른 하나는 관리자 콘솔 슬래시 admin — 글을 만들고 고치고 지우고, 사이트 웹페이지 노출까지 상위에서 관리하고, 데이터를 백업합니다. 암호로 잠가뒀습니다. 아라미러는 깃허브 페이지 정적 사이트인데도, 이 CRUD가 실제로 동작합니다. 지금은 브라우저에 저장되고, 서버로 올릴 준비까지 끝냈습니다.</a:t>
+              <a:t>제가 뒤집은 원칙은 세 가지입니다. 첫째, 입력 마찰을 0으로. 저는 그냥 텔레그램에 말만 던지고, 그날 저널에 자동으로 쌓이게 했습니다. 둘째, 정리는 100% AI가. 분류하고 연결하고 서술하는 건 전부 AI가 하고, 밤마다 지난 기록과 자동으로 엮여 지식이 됩니다. 셋째, 소유권은 저에게. AI는 편집자일 뿐이고 생각은 제 것입니다. 그리고 제가 특별히 세운 원칙이 하나 있어요. The Wall, 생각의 벽입니다. 제 생각(자산)과 남에게서 온 것(연료)을 절대 섞지 않고, 연료엔 반드시 출처를 답니다.</a:t>
             </a:r>
           </a:p>
         </p:txBody>
@@ -716,7 +718,7 @@
           <a:lstStyle/>
           <a:p>
             <a:r>
-              <a:t>어떻게 만들었는지도 공유회에서 배운 방법 그대로입니다. 핵심 문장은 '재활용이 자동화의 핵심이고, 그게 스킬이다'예요. 첫째, 공유회에서 올라온 스크린샷 32장을 제가 일일이 보지 않고 서브에이전트를 시켜 병렬로 MECE하게 정리했습니다. 공유회 마지막 주제였던 서브에이전트를 문서화에 바로 써먹은 거죠. 둘째, 디자인은 지금 제 홈페이지와 똑같은 블랙앤화이트, 여백 위주로 맞췄습니다. 잘 만든 걸 레퍼런스로 카피하며 배우라는 것도 공유회 내용입니다. 셋째, 만든 화면을 스크린샷으로 자가검수하다가 실제 버그를 두 개 잡았어요. 하나는 빈 팝업이 뜨던 것, 하나는 로그인 후 새로고침하면 관리자 화면이 깨지던 겁니다. 스크린샷 안 찍었으면 그대로 나갈 뻔했습니다. 넷째, 배포할 때 기존에 올려둔 다른 앱들을 지우지 않도록 안전하게 배포했습니다.</a:t>
+              <a:t>만드는 과정은 순탄하지 않았습니다. 제가 직접 부딪힌 벽들이에요. 가장 먼저 'AI가 나를 대신하는 거 아닌가' 하는 불안이 왔습니다. 이건 한 문장으로 매듭지었어요 — 대신하지 않는다, 거울이 된다. 그 다음엔 봇이 자꾸 죽었습니다. 일반 창이나 headless로는 즉시 꺼져서, winpty로 감싸고 자동시작을 걸어 24시간 살렸습니다. 배포하니 모바일과 PC에서 디자인이 깨졌고, 흑백 미니멀로 전면 개편한 뒤 스크린샷으로 직접 검수하고 다시 배포했습니다. 이 부딪히고 고치는 과정 자체가, 이 OS를 진짜 제 것으로 만든 순간이었습니다.</a:t>
             </a:r>
           </a:p>
         </p:txBody>
@@ -786,7 +788,147 @@
           <a:lstStyle/>
           <a:p>
             <a:r>
-              <a:t>마지막으로 결과와 다음 계획입니다. 오늘 만든 게시판과 관리자는 이미 라이브에 올라가 있습니다. 주소는 hyun-arch 점 github 점 io 슬래시 board, 그리고 슬래시 admin입니다. 발견한 버그 두 개도 수정해서 다시 배포하고 재검증까지 마쳤습니다. 다음 단계는 '진짜 서버'입니다. 지금은 브라우저 저장이지만, Supabase와 Vercel을 연결하면 어느 기기에서 접속해도 같은 데이터가 보이는 실서버 CRUD가 됩니다. 코드는 이미 다 짜뒀고, 키만 꽂으면 됩니다. 정리하면, 제가 오늘 배운 건 이 한 문장입니다 — '기록이 아니라 승격이 핵심이다.' 던진 생각이 연결되고 자산이 될 때, 비로소 AI가 저를 비추는 거울이 됩니다. 감사합니다.</a:t>
+              <a:t>여기서부터는 배움 이야기입니다. 이기적스폰지 공유회에서 다섯 가지를 배웠어요. ①반복을 스킬로 굳히기, ②KEY를 연결해 CRUD 게시판 만들기, ③딥인터뷰로 내 재료 찾기, ④씽킹노트로 배운 걸 붙잡기, ⑤서브에이전트로 큰 일을 쪼개 병렬로. 관통하는 한 문장은 — 재활용이 자동화의 핵심이고 그게 스킬이다, 그리고 스킬과 서브에이전트는 본질적으로 한 몸이라는 겁니다.</a:t>
+            </a:r>
+          </a:p>
+        </p:txBody>
+      </p:sp>
+      <p:sp>
+        <p:nvSpPr>
+          <p:cNvPr id="4" name="Slide Number Placeholder 3"/>
+          <p:cNvSpPr>
+            <a:spLocks noGrp="1"/>
+          </p:cNvSpPr>
+          <p:nvPr>
+            <p:ph type="sldNum" idx="5" sz="quarter"/>
+          </p:nvPr>
+        </p:nvSpPr>
+        <p:spPr/>
+      </p:sp>
+    </p:spTree>
+  </p:cSld>
+  <p:clrMapOvr>
+    <a:masterClrMapping/>
+  </p:clrMapOvr>
+</p:notes>
+</file>
+
+<file path=ppt/notesSlides/notesSlide6.xml><?xml version="1.0" encoding="utf-8"?>
+<p:notes xmlns:a="http://schemas.openxmlformats.org/drawingml/2006/main" xmlns:p="http://schemas.openxmlformats.org/presentationml/2006/main" xmlns:r="http://schemas.openxmlformats.org/officeDocument/2006/relationships">
+  <p:cSld>
+    <p:spTree>
+      <p:nvGrpSpPr>
+        <p:cNvPr id="1" name=""/>
+        <p:cNvGrpSpPr/>
+        <p:nvPr/>
+      </p:nvGrpSpPr>
+      <p:grpSpPr>
+        <a:xfrm>
+          <a:off x="0" y="0"/>
+          <a:ext cx="0" cy="0"/>
+          <a:chOff x="0" y="0"/>
+          <a:chExt cx="0" cy="0"/>
+        </a:xfrm>
+      </p:grpSpPr>
+      <p:sp>
+        <p:nvSpPr>
+          <p:cNvPr id="2" name="Slide Image Placeholder 1"/>
+          <p:cNvSpPr>
+            <a:spLocks noGrp="1"/>
+          </p:cNvSpPr>
+          <p:nvPr>
+            <p:ph type="sldImg" idx="2"/>
+          </p:nvPr>
+        </p:nvSpPr>
+        <p:spPr/>
+      </p:sp>
+      <p:sp>
+        <p:nvSpPr>
+          <p:cNvPr id="3" name="Notes Placeholder 2"/>
+          <p:cNvSpPr>
+            <a:spLocks noGrp="1"/>
+          </p:cNvSpPr>
+          <p:nvPr>
+            <p:ph type="body" idx="3" sz="quarter"/>
+          </p:nvPr>
+        </p:nvSpPr>
+        <p:spPr/>
+        <p:txBody>
+          <a:bodyPr/>
+          <a:lstStyle/>
+          <a:p>
+            <a:r>
+              <a:t>중요한 건 듣고 끝이 아니었다는 거예요. 저는 그날 바로 세 개를 제 것에 적용했습니다. ②번 그대로, 게시판과 관리자 콘솔을 그날 만들었습니다. 정적 사이트라 지금은 브라우저 저장으로 돌지만 KEY만 꽂으면 실서버로 승격됩니다. ⑤번 그대로, 공유회 스크린샷 32장을 서브에이전트로 병렬 정리했어요. 배운 방법을 문서화하는 바로 그 자리에서 써먹은 겁니다. 그리고 스크린샷 자가검수로 실제 버그 2개를 잡아 고쳤고, 지금 라이브로 돌아갑니다.</a:t>
+            </a:r>
+          </a:p>
+        </p:txBody>
+      </p:sp>
+      <p:sp>
+        <p:nvSpPr>
+          <p:cNvPr id="4" name="Slide Number Placeholder 3"/>
+          <p:cNvSpPr>
+            <a:spLocks noGrp="1"/>
+          </p:cNvSpPr>
+          <p:nvPr>
+            <p:ph type="sldNum" idx="5" sz="quarter"/>
+          </p:nvPr>
+        </p:nvSpPr>
+        <p:spPr/>
+      </p:sp>
+    </p:spTree>
+  </p:cSld>
+  <p:clrMapOvr>
+    <a:masterClrMapping/>
+  </p:clrMapOvr>
+</p:notes>
+</file>
+
+<file path=ppt/notesSlides/notesSlide7.xml><?xml version="1.0" encoding="utf-8"?>
+<p:notes xmlns:a="http://schemas.openxmlformats.org/drawingml/2006/main" xmlns:p="http://schemas.openxmlformats.org/presentationml/2006/main" xmlns:r="http://schemas.openxmlformats.org/officeDocument/2006/relationships">
+  <p:cSld>
+    <p:spTree>
+      <p:nvGrpSpPr>
+        <p:cNvPr id="1" name=""/>
+        <p:cNvGrpSpPr/>
+        <p:nvPr/>
+      </p:nvGrpSpPr>
+      <p:grpSpPr>
+        <a:xfrm>
+          <a:off x="0" y="0"/>
+          <a:ext cx="0" cy="0"/>
+          <a:chOff x="0" y="0"/>
+          <a:chExt cx="0" cy="0"/>
+        </a:xfrm>
+      </p:grpSpPr>
+      <p:sp>
+        <p:nvSpPr>
+          <p:cNvPr id="2" name="Slide Image Placeholder 1"/>
+          <p:cNvSpPr>
+            <a:spLocks noGrp="1"/>
+          </p:cNvSpPr>
+          <p:nvPr>
+            <p:ph type="sldImg" idx="2"/>
+          </p:nvPr>
+        </p:nvSpPr>
+        <p:spPr/>
+      </p:sp>
+      <p:sp>
+        <p:nvSpPr>
+          <p:cNvPr id="3" name="Notes Placeholder 2"/>
+          <p:cNvSpPr>
+            <a:spLocks noGrp="1"/>
+          </p:cNvSpPr>
+          <p:nvPr>
+            <p:ph type="body" idx="3" sz="quarter"/>
+          </p:nvPr>
+        </p:nvSpPr>
+        <p:spPr/>
+        <p:txBody>
+          <a:bodyPr/>
+          <a:lstStyle/>
+          <a:p>
+            <a:r>
+              <a:t>정리하겠습니다. 아라미러는 이미 라이브고, 매일 아침 7시 텔레그램 보고로 OS가 실제로 돌고 있습니다. 제가 배운 두 문장으로 마무리할게요. 첫째, 기록이 아니라 '승격'이 핵심이다 — 던진 생각이 자산이 될 때 AI는 저를 비추는 거울이 됩니다. 둘째, 강의를 들었다가 아니라 '그날 바로 하나 만들었다'가 남는다. 배움도 그날 재활용해야 자산이 됩니다. 감사합니다.</a:t>
             </a:r>
           </a:p>
         </p:txBody>
@@ -3794,25 +3936,63 @@
       <p:grpSpPr/>
       <p:sp>
         <p:nvSpPr>
-          <p:cNvPr id="2" name="Rectangle 1"/>
+          <p:cNvPr id="2" name="TextBox 1"/>
+          <p:cNvSpPr txBox="1"/>
+          <p:nvPr/>
+        </p:nvSpPr>
+        <p:spPr>
+          <a:xfrm>
+            <a:off x="877824" y="658368"/>
+            <a:ext cx="10436047" cy="365760"/>
+          </a:xfrm>
+          <a:prstGeom prst="rect">
+            <a:avLst/>
+          </a:prstGeom>
+          <a:noFill/>
+        </p:spPr>
+        <p:txBody>
+          <a:bodyPr wrap="square" anchor="t" lIns="0" rIns="0" tIns="0" bIns="0">
+            <a:spAutoFit/>
+          </a:bodyPr>
+          <a:lstStyle/>
+          <a:p>
+            <a:pPr algn="l">
+              <a:lnSpc>
+                <a:spcPct val="110000"/>
+              </a:lnSpc>
+            </a:pPr>
+            <a:r>
+              <a:rPr sz="1100" b="1">
+                <a:solidFill>
+                  <a:srgbClr val="6E6E73"/>
+                </a:solidFill>
+                <a:latin typeface="Pretendard"/>
+              </a:rPr>
+              <a:t>ARAMIRROR · 내가 만든 이야기</a:t>
+            </a:r>
+          </a:p>
+        </p:txBody>
+      </p:sp>
+      <p:sp>
+        <p:nvSpPr>
+          <p:cNvPr id="3" name="Rectangle 2"/>
           <p:cNvSpPr/>
           <p:nvPr/>
         </p:nvSpPr>
         <p:spPr>
           <a:xfrm>
-            <a:off x="0" y="0"/>
-            <a:ext cx="12191695" cy="6858000"/>
+            <a:off x="877824" y="1024128"/>
+            <a:ext cx="566928" cy="38100"/>
           </a:xfrm>
           <a:prstGeom prst="rect">
             <a:avLst/>
           </a:prstGeom>
           <a:solidFill>
-            <a:srgbClr val="FFFFFF"/>
+            <a:srgbClr val="1D1D1F"/>
           </a:solidFill>
           <a:ln>
             <a:noFill/>
           </a:ln>
-          <a:effectLst/>
         </p:spPr>
         <p:style>
           <a:lnRef idx="1">
@@ -3838,14 +4018,14 @@
       </p:sp>
       <p:sp>
         <p:nvSpPr>
-          <p:cNvPr id="3" name="TextBox 2"/>
+          <p:cNvPr id="4" name="TextBox 3"/>
           <p:cNvSpPr txBox="1"/>
           <p:nvPr/>
         </p:nvSpPr>
         <p:spPr>
           <a:xfrm>
-            <a:off x="868680" y="868680"/>
-            <a:ext cx="10058400" cy="365760"/>
+            <a:off x="877824" y="2148840"/>
+            <a:ext cx="10436047" cy="2011680"/>
           </a:xfrm>
           <a:prstGeom prst="rect">
             <a:avLst/>
@@ -3860,40 +4040,132 @@
           <a:p>
             <a:pPr algn="l">
               <a:lnSpc>
-                <a:spcPct val="115000"/>
+                <a:spcPct val="104000"/>
               </a:lnSpc>
             </a:pPr>
             <a:r>
-              <a:rPr sz="1300" b="1">
+              <a:rPr sz="4400" b="1">
+                <a:solidFill>
+                  <a:srgbClr val="1D1D1F"/>
+                </a:solidFill>
+                <a:latin typeface="Pretendard"/>
+              </a:rPr>
+              <a:t>AI는 나를 대신하지 않는다 —</a:t>
+            </a:r>
+          </a:p>
+          <a:p>
+            <a:pPr algn="l">
+              <a:lnSpc>
+                <a:spcPct val="104000"/>
+              </a:lnSpc>
+            </a:pPr>
+            <a:r>
+              <a:rPr sz="4400" b="1">
+                <a:solidFill>
+                  <a:srgbClr val="1D1D1F"/>
+                </a:solidFill>
+                <a:latin typeface="Pretendard"/>
+              </a:rPr>
+              <a:t>거울이 된다.</a:t>
+            </a:r>
+          </a:p>
+        </p:txBody>
+      </p:sp>
+      <p:sp>
+        <p:nvSpPr>
+          <p:cNvPr id="5" name="TextBox 4"/>
+          <p:cNvSpPr txBox="1"/>
+          <p:nvPr/>
+        </p:nvSpPr>
+        <p:spPr>
+          <a:xfrm>
+            <a:off x="877824" y="4160520"/>
+            <a:ext cx="10436047" cy="640080"/>
+          </a:xfrm>
+          <a:prstGeom prst="rect">
+            <a:avLst/>
+          </a:prstGeom>
+          <a:noFill/>
+        </p:spPr>
+        <p:txBody>
+          <a:bodyPr wrap="square" anchor="t" lIns="0" rIns="0" tIns="0" bIns="0">
+            <a:spAutoFit/>
+          </a:bodyPr>
+          <a:lstStyle/>
+          <a:p>
+            <a:pPr algn="l">
+              <a:lnSpc>
+                <a:spcPct val="110000"/>
+              </a:lnSpc>
+            </a:pPr>
+            <a:r>
+              <a:rPr sz="1700" b="0">
+                <a:solidFill>
+                  <a:srgbClr val="424245"/>
+                </a:solidFill>
+                <a:latin typeface="Pretendard"/>
+              </a:rPr>
+              <a:t>내가 직접 기획하고, 부딪히고, 만든 나만의 OS — 그리고 배운 걸 그날 써먹은 이야기</a:t>
+            </a:r>
+          </a:p>
+        </p:txBody>
+      </p:sp>
+      <p:sp>
+        <p:nvSpPr>
+          <p:cNvPr id="6" name="TextBox 5"/>
+          <p:cNvSpPr txBox="1"/>
+          <p:nvPr/>
+        </p:nvSpPr>
+        <p:spPr>
+          <a:xfrm>
+            <a:off x="877824" y="4709160"/>
+            <a:ext cx="10436047" cy="365760"/>
+          </a:xfrm>
+          <a:prstGeom prst="rect">
+            <a:avLst/>
+          </a:prstGeom>
+          <a:noFill/>
+        </p:spPr>
+        <p:txBody>
+          <a:bodyPr wrap="square" anchor="t" lIns="0" rIns="0" tIns="0" bIns="0">
+            <a:spAutoFit/>
+          </a:bodyPr>
+          <a:lstStyle/>
+          <a:p>
+            <a:pPr algn="l">
+              <a:lnSpc>
+                <a:spcPct val="110000"/>
+              </a:lnSpc>
+            </a:pPr>
+            <a:r>
+              <a:rPr sz="1200" b="0">
                 <a:solidFill>
                   <a:srgbClr val="6E6E73"/>
                 </a:solidFill>
-                <a:latin typeface="맑은 고딕"/>
-                <a:ea typeface="맑은 고딕"/>
-                <a:cs typeface="맑은 고딕"/>
-              </a:rPr>
-              <a:t>ARAMIRROR  ·  BUILD REPORT</a:t>
+                <a:latin typeface="Pretendard"/>
+              </a:rPr>
+              <a:t>2026.07.04 · 박상현(아람) · 스폰지클럽 2기 5조</a:t>
             </a:r>
           </a:p>
         </p:txBody>
       </p:sp>
       <p:cxnSp>
         <p:nvCxnSpPr>
-          <p:cNvPr id="4" name="Connector 3"/>
+          <p:cNvPr id="7" name="Connector 6"/>
           <p:cNvCxnSpPr/>
           <p:nvPr/>
         </p:nvCxnSpPr>
         <p:spPr>
           <a:xfrm>
-            <a:off x="868680" y="1371600"/>
-            <a:ext cx="566928" cy="0"/>
+            <a:off x="877824" y="6263640"/>
+            <a:ext cx="10436047" cy="0"/>
           </a:xfrm>
           <a:prstGeom prst="bentConnector3">
             <a:avLst/>
           </a:prstGeom>
-          <a:ln w="27940">
+          <a:ln w="9525">
             <a:solidFill>
-              <a:srgbClr val="1D1D1F"/>
+              <a:srgbClr val="D2D2D7"/>
             </a:solidFill>
           </a:ln>
         </p:spPr>
@@ -3914,14 +4186,14 @@
       </p:cxnSp>
       <p:sp>
         <p:nvSpPr>
-          <p:cNvPr id="5" name="TextBox 4"/>
+          <p:cNvPr id="8" name="TextBox 7"/>
           <p:cNvSpPr txBox="1"/>
           <p:nvPr/>
         </p:nvSpPr>
         <p:spPr>
           <a:xfrm>
-            <a:off x="868680" y="2148840"/>
-            <a:ext cx="10424160" cy="2194560"/>
+            <a:off x="877824" y="6355080"/>
+            <a:ext cx="10436047" cy="320040"/>
           </a:xfrm>
           <a:prstGeom prst="rect">
             <a:avLst/>
@@ -3936,62 +4208,40 @@
           <a:p>
             <a:pPr algn="l">
               <a:lnSpc>
-                <a:spcPct val="105000"/>
+                <a:spcPct val="110000"/>
               </a:lnSpc>
             </a:pPr>
             <a:r>
-              <a:rPr sz="4600" b="1">
-                <a:solidFill>
-                  <a:srgbClr val="1D1D1F"/>
-                </a:solidFill>
-                <a:latin typeface="맑은 고딕"/>
-                <a:ea typeface="맑은 고딕"/>
-                <a:cs typeface="맑은 고딕"/>
-              </a:rPr>
-              <a:t>AI는 나를 대신하지 않는다 —</a:t>
-            </a:r>
-          </a:p>
-          <a:p>
-            <a:pPr algn="l">
-              <a:lnSpc>
-                <a:spcPct val="105000"/>
-              </a:lnSpc>
-            </a:pPr>
-            <a:r>
-              <a:rPr sz="4600" b="1">
-                <a:solidFill>
-                  <a:srgbClr val="1D1D1F"/>
-                </a:solidFill>
-                <a:latin typeface="맑은 고딕"/>
-                <a:ea typeface="맑은 고딕"/>
-                <a:cs typeface="맑은 고딕"/>
-              </a:rPr>
-              <a:t>거울</a:t>
-            </a:r>
-            <a:r>
-              <a:rPr sz="4600" b="1">
-                <a:solidFill>
-                  <a:srgbClr val="1D1D1F"/>
-                </a:solidFill>
-                <a:latin typeface="맑은 고딕"/>
-                <a:ea typeface="맑은 고딕"/>
-                <a:cs typeface="맑은 고딕"/>
-              </a:rPr>
-              <a:t>이 된다.</a:t>
-            </a:r>
-          </a:p>
-        </p:txBody>
-      </p:sp>
-      <p:sp>
-        <p:nvSpPr>
-          <p:cNvPr id="6" name="TextBox 5"/>
+              <a:rPr sz="900" b="1">
+                <a:solidFill>
+                  <a:srgbClr val="6E6E73"/>
+                </a:solidFill>
+                <a:latin typeface="Pretendard"/>
+              </a:rPr>
+              <a:t>Aramirror</a:t>
+            </a:r>
+            <a:r>
+              <a:rPr sz="900" b="0">
+                <a:solidFill>
+                  <a:srgbClr val="6E6E73"/>
+                </a:solidFill>
+                <a:latin typeface="Pretendard"/>
+              </a:rPr>
+              <a:t>  — AI는 거울이 된다</a:t>
+            </a:r>
+          </a:p>
+        </p:txBody>
+      </p:sp>
+      <p:sp>
+        <p:nvSpPr>
+          <p:cNvPr id="9" name="TextBox 8"/>
           <p:cNvSpPr txBox="1"/>
           <p:nvPr/>
         </p:nvSpPr>
         <p:spPr>
           <a:xfrm>
-            <a:off x="868680" y="4343400"/>
-            <a:ext cx="10058400" cy="457200"/>
+            <a:off x="877824" y="6355080"/>
+            <a:ext cx="10436047" cy="320040"/>
           </a:xfrm>
           <a:prstGeom prst="rect">
             <a:avLst/>
@@ -4004,190 +4254,19 @@
           </a:bodyPr>
           <a:lstStyle/>
           <a:p>
-            <a:pPr algn="l">
+            <a:pPr algn="r">
               <a:lnSpc>
-                <a:spcPct val="115000"/>
+                <a:spcPct val="110000"/>
               </a:lnSpc>
             </a:pPr>
             <a:r>
-              <a:rPr sz="1800" b="0">
-                <a:solidFill>
-                  <a:srgbClr val="424245"/>
-                </a:solidFill>
-                <a:latin typeface="맑은 고딕"/>
-                <a:ea typeface="맑은 고딕"/>
-                <a:cs typeface="맑은 고딕"/>
-              </a:rPr>
-              <a:t>생각이 자산이 되는 환경 — 오늘까지의 빌드 리포트</a:t>
-            </a:r>
-          </a:p>
-        </p:txBody>
-      </p:sp>
-      <p:sp>
-        <p:nvSpPr>
-          <p:cNvPr id="7" name="TextBox 6"/>
-          <p:cNvSpPr txBox="1"/>
-          <p:nvPr/>
-        </p:nvSpPr>
-        <p:spPr>
-          <a:xfrm>
-            <a:off x="868680" y="4892040"/>
-            <a:ext cx="10058400" cy="365760"/>
-          </a:xfrm>
-          <a:prstGeom prst="rect">
-            <a:avLst/>
-          </a:prstGeom>
-          <a:noFill/>
-        </p:spPr>
-        <p:txBody>
-          <a:bodyPr wrap="square" anchor="t" lIns="0" rIns="0" tIns="0" bIns="0">
-            <a:spAutoFit/>
-          </a:bodyPr>
-          <a:lstStyle/>
-          <a:p>
-            <a:pPr algn="l">
-              <a:lnSpc>
-                <a:spcPct val="115000"/>
-              </a:lnSpc>
-            </a:pPr>
-            <a:r>
-              <a:rPr sz="1300" b="0">
+              <a:rPr sz="900" b="0">
                 <a:solidFill>
                   <a:srgbClr val="6E6E73"/>
                 </a:solidFill>
-                <a:latin typeface="맑은 고딕"/>
-                <a:ea typeface="맑은 고딕"/>
-                <a:cs typeface="맑은 고딕"/>
-              </a:rPr>
-              <a:t>2026.07.04   ·   박상현(아람)   ·   스폰지클럽 2기 5조</a:t>
-            </a:r>
-          </a:p>
-        </p:txBody>
-      </p:sp>
-      <p:cxnSp>
-        <p:nvCxnSpPr>
-          <p:cNvPr id="8" name="Connector 7"/>
-          <p:cNvCxnSpPr/>
-          <p:nvPr/>
-        </p:nvCxnSpPr>
-        <p:spPr>
-          <a:xfrm>
-            <a:off x="868680" y="6144768"/>
-            <a:ext cx="10454335" cy="0"/>
-          </a:xfrm>
-          <a:prstGeom prst="bentConnector3">
-            <a:avLst/>
-          </a:prstGeom>
-          <a:ln w="9525">
-            <a:solidFill>
-              <a:srgbClr val="D2D2D7"/>
-            </a:solidFill>
-          </a:ln>
-        </p:spPr>
-        <p:style>
-          <a:lnRef idx="2">
-            <a:schemeClr val="accent1"/>
-          </a:lnRef>
-          <a:fillRef idx="0">
-            <a:schemeClr val="accent1"/>
-          </a:fillRef>
-          <a:effectRef idx="1">
-            <a:schemeClr val="accent1"/>
-          </a:effectRef>
-          <a:fontRef idx="minor">
-            <a:schemeClr val="tx1"/>
-          </a:fontRef>
-        </p:style>
-      </p:cxnSp>
-      <p:sp>
-        <p:nvSpPr>
-          <p:cNvPr id="9" name="TextBox 8"/>
-          <p:cNvSpPr txBox="1"/>
-          <p:nvPr/>
-        </p:nvSpPr>
-        <p:spPr>
-          <a:xfrm>
-            <a:off x="868680" y="6236208"/>
-            <a:ext cx="7315200" cy="365760"/>
-          </a:xfrm>
-          <a:prstGeom prst="rect">
-            <a:avLst/>
-          </a:prstGeom>
-          <a:noFill/>
-        </p:spPr>
-        <p:txBody>
-          <a:bodyPr wrap="square" anchor="t" lIns="0" rIns="0" tIns="0" bIns="0">
-            <a:spAutoFit/>
-          </a:bodyPr>
-          <a:lstStyle/>
-          <a:p>
-            <a:pPr algn="l">
-              <a:lnSpc>
-                <a:spcPct val="115000"/>
-              </a:lnSpc>
-            </a:pPr>
-            <a:r>
-              <a:rPr sz="950" b="1">
-                <a:solidFill>
-                  <a:srgbClr val="6E6E73"/>
-                </a:solidFill>
-                <a:latin typeface="맑은 고딕"/>
-                <a:ea typeface="맑은 고딕"/>
-                <a:cs typeface="맑은 고딕"/>
-              </a:rPr>
-              <a:t>Aramirror</a:t>
-            </a:r>
-            <a:r>
-              <a:rPr sz="950" b="0">
-                <a:solidFill>
-                  <a:srgbClr val="6E6E73"/>
-                </a:solidFill>
-                <a:latin typeface="맑은 고딕"/>
-                <a:ea typeface="맑은 고딕"/>
-                <a:cs typeface="맑은 고딕"/>
-              </a:rPr>
-              <a:t>  —  AI는 거울이 된다</a:t>
-            </a:r>
-          </a:p>
-        </p:txBody>
-      </p:sp>
-      <p:sp>
-        <p:nvSpPr>
-          <p:cNvPr id="10" name="TextBox 9"/>
-          <p:cNvSpPr txBox="1"/>
-          <p:nvPr/>
-        </p:nvSpPr>
-        <p:spPr>
-          <a:xfrm>
-            <a:off x="9494215" y="6236208"/>
-            <a:ext cx="1828800" cy="365760"/>
-          </a:xfrm>
-          <a:prstGeom prst="rect">
-            <a:avLst/>
-          </a:prstGeom>
-          <a:noFill/>
-        </p:spPr>
-        <p:txBody>
-          <a:bodyPr wrap="square" anchor="t" lIns="0" rIns="0" tIns="0" bIns="0">
-            <a:spAutoFit/>
-          </a:bodyPr>
-          <a:lstStyle/>
-          <a:p>
-            <a:pPr algn="r">
-              <a:lnSpc>
-                <a:spcPct val="115000"/>
-              </a:lnSpc>
-            </a:pPr>
-            <a:r>
-              <a:rPr sz="950" b="0">
-                <a:solidFill>
-                  <a:srgbClr val="6E6E73"/>
-                </a:solidFill>
-                <a:latin typeface="맑은 고딕"/>
-                <a:ea typeface="맑은 고딕"/>
-                <a:cs typeface="맑은 고딕"/>
-              </a:rPr>
-              <a:t>01 / 05</a:t>
+                <a:latin typeface="Pretendard"/>
+              </a:rPr>
+              <a:t>01 / 07</a:t>
             </a:r>
           </a:p>
         </p:txBody>
@@ -4212,25 +4291,63 @@
       <p:grpSpPr/>
       <p:sp>
         <p:nvSpPr>
-          <p:cNvPr id="2" name="Rectangle 1"/>
+          <p:cNvPr id="2" name="TextBox 1"/>
+          <p:cNvSpPr txBox="1"/>
+          <p:nvPr/>
+        </p:nvSpPr>
+        <p:spPr>
+          <a:xfrm>
+            <a:off x="877824" y="658368"/>
+            <a:ext cx="10436047" cy="365760"/>
+          </a:xfrm>
+          <a:prstGeom prst="rect">
+            <a:avLst/>
+          </a:prstGeom>
+          <a:noFill/>
+        </p:spPr>
+        <p:txBody>
+          <a:bodyPr wrap="square" anchor="t" lIns="0" rIns="0" tIns="0" bIns="0">
+            <a:spAutoFit/>
+          </a:bodyPr>
+          <a:lstStyle/>
+          <a:p>
+            <a:pPr algn="l">
+              <a:lnSpc>
+                <a:spcPct val="110000"/>
+              </a:lnSpc>
+            </a:pPr>
+            <a:r>
+              <a:rPr sz="1100" b="1">
+                <a:solidFill>
+                  <a:srgbClr val="6E6E73"/>
+                </a:solidFill>
+                <a:latin typeface="Pretendard"/>
+              </a:rPr>
+              <a:t>01 · WHY — 왜 시작했나</a:t>
+            </a:r>
+          </a:p>
+        </p:txBody>
+      </p:sp>
+      <p:sp>
+        <p:nvSpPr>
+          <p:cNvPr id="3" name="Rectangle 2"/>
           <p:cNvSpPr/>
           <p:nvPr/>
         </p:nvSpPr>
         <p:spPr>
           <a:xfrm>
-            <a:off x="0" y="0"/>
-            <a:ext cx="12191695" cy="6858000"/>
+            <a:off x="877824" y="1024128"/>
+            <a:ext cx="566928" cy="38100"/>
           </a:xfrm>
           <a:prstGeom prst="rect">
             <a:avLst/>
           </a:prstGeom>
           <a:solidFill>
-            <a:srgbClr val="FFFFFF"/>
+            <a:srgbClr val="1D1D1F"/>
           </a:solidFill>
           <a:ln>
             <a:noFill/>
           </a:ln>
-          <a:effectLst/>
         </p:spPr>
         <p:style>
           <a:lnRef idx="1">
@@ -4256,14 +4373,14 @@
       </p:sp>
       <p:sp>
         <p:nvSpPr>
-          <p:cNvPr id="3" name="TextBox 2"/>
+          <p:cNvPr id="4" name="TextBox 3"/>
           <p:cNvSpPr txBox="1"/>
           <p:nvPr/>
         </p:nvSpPr>
         <p:spPr>
           <a:xfrm>
-            <a:off x="868680" y="658368"/>
-            <a:ext cx="10058400" cy="365760"/>
+            <a:off x="877824" y="1234440"/>
+            <a:ext cx="10436047" cy="822960"/>
           </a:xfrm>
           <a:prstGeom prst="rect">
             <a:avLst/>
@@ -4278,40 +4395,172 @@
           <a:p>
             <a:pPr algn="l">
               <a:lnSpc>
-                <a:spcPct val="115000"/>
+                <a:spcPct val="110000"/>
               </a:lnSpc>
             </a:pPr>
             <a:r>
-              <a:rPr sz="1200" b="1">
+              <a:rPr sz="3400" b="1">
+                <a:solidFill>
+                  <a:srgbClr val="1D1D1F"/>
+                </a:solidFill>
+                <a:latin typeface="Pretendard"/>
+              </a:rPr>
+              <a:t>내 한계에서 시작됐다</a:t>
+            </a:r>
+          </a:p>
+        </p:txBody>
+      </p:sp>
+      <p:sp>
+        <p:nvSpPr>
+          <p:cNvPr id="5" name="TextBox 4"/>
+          <p:cNvSpPr txBox="1"/>
+          <p:nvPr/>
+        </p:nvSpPr>
+        <p:spPr>
+          <a:xfrm>
+            <a:off x="877824" y="2286000"/>
+            <a:ext cx="10436047" cy="3931920"/>
+          </a:xfrm>
+          <a:prstGeom prst="rect">
+            <a:avLst/>
+          </a:prstGeom>
+          <a:noFill/>
+        </p:spPr>
+        <p:txBody>
+          <a:bodyPr wrap="square" lIns="0" rIns="0" tIns="0" bIns="0">
+            <a:spAutoFit/>
+          </a:bodyPr>
+          <a:lstStyle/>
+          <a:p>
+            <a:pPr>
+              <a:lnSpc>
+                <a:spcPct val="124000"/>
+              </a:lnSpc>
+              <a:spcAft>
+                <a:spcPts val="1400"/>
+              </a:spcAft>
+            </a:pPr>
+            <a:r>
+              <a:rPr sz="1900" b="1">
+                <a:solidFill>
+                  <a:srgbClr val="1D1D1F"/>
+                </a:solidFill>
+                <a:latin typeface="Pretendard"/>
+              </a:rPr>
+              <a:t>—  </a:t>
+            </a:r>
+            <a:r>
+              <a:rPr sz="1900" b="1">
+                <a:solidFill>
+                  <a:srgbClr val="1D1D1F"/>
+                </a:solidFill>
+                <a:latin typeface="Pretendard"/>
+              </a:rPr>
+              <a:t>피곤한 밤이었다.  </a:t>
+            </a:r>
+            <a:r>
+              <a:rPr sz="1600">
                 <a:solidFill>
                   <a:srgbClr val="6E6E73"/>
                 </a:solidFill>
-                <a:latin typeface="맑은 고딕"/>
-                <a:ea typeface="맑은 고딕"/>
-                <a:cs typeface="맑은 고딕"/>
-              </a:rPr>
-              <a:t>01 · WHAT — 아라미러란</a:t>
+                <a:latin typeface="Pretendard"/>
+              </a:rPr>
+              <a:t>미국 출장에서 막 돌아와, 제주 주말도 못 쉰 날. 머릿속엔 NYU 발표·스폰지클럽·풀 일들이 가득했다.</a:t>
+            </a:r>
+          </a:p>
+          <a:p>
+            <a:pPr>
+              <a:lnSpc>
+                <a:spcPct val="124000"/>
+              </a:lnSpc>
+              <a:spcAft>
+                <a:spcPts val="1400"/>
+              </a:spcAft>
+            </a:pPr>
+            <a:r>
+              <a:rPr sz="1900" b="1">
+                <a:solidFill>
+                  <a:srgbClr val="1D1D1F"/>
+                </a:solidFill>
+                <a:latin typeface="Pretendard"/>
+              </a:rPr>
+              <a:t>—  </a:t>
+            </a:r>
+            <a:r>
+              <a:rPr sz="1900" b="1">
+                <a:solidFill>
+                  <a:srgbClr val="1D1D1F"/>
+                </a:solidFill>
+                <a:latin typeface="Pretendard"/>
+              </a:rPr>
+              <a:t>깨달음.  </a:t>
+            </a:r>
+            <a:r>
+              <a:rPr sz="1600">
+                <a:solidFill>
+                  <a:srgbClr val="6E6E73"/>
+                </a:solidFill>
+                <a:latin typeface="Pretendard"/>
+              </a:rPr>
+              <a:t>한계를 넘는 건 '더 버티기'가 아니라 '머릿속을 비우는 것'. 정리 안 된 생각이 제일 무겁다.</a:t>
+            </a:r>
+          </a:p>
+          <a:p>
+            <a:pPr>
+              <a:lnSpc>
+                <a:spcPct val="124000"/>
+              </a:lnSpc>
+              <a:spcAft>
+                <a:spcPts val="1400"/>
+              </a:spcAft>
+            </a:pPr>
+            <a:r>
+              <a:rPr sz="1900" b="1">
+                <a:solidFill>
+                  <a:srgbClr val="1D1D1F"/>
+                </a:solidFill>
+                <a:latin typeface="Pretendard"/>
+              </a:rPr>
+              <a:t>—  </a:t>
+            </a:r>
+            <a:r>
+              <a:rPr sz="1900" b="1">
+                <a:solidFill>
+                  <a:srgbClr val="1D1D1F"/>
+                </a:solidFill>
+                <a:latin typeface="Pretendard"/>
+              </a:rPr>
+              <a:t>다 며칠 못 갔다.  </a:t>
+            </a:r>
+            <a:r>
+              <a:rPr sz="1600">
+                <a:solidFill>
+                  <a:srgbClr val="6E6E73"/>
+                </a:solidFill>
+                <a:latin typeface="Pretendard"/>
+              </a:rPr>
+              <a:t>노션·보드·태그… 정리에 내 손이 들어가니까. 그래서 원칙을 뒤집기로 했다.</a:t>
             </a:r>
           </a:p>
         </p:txBody>
       </p:sp>
       <p:cxnSp>
         <p:nvCxnSpPr>
-          <p:cNvPr id="4" name="Connector 3"/>
+          <p:cNvPr id="6" name="Connector 5"/>
           <p:cNvCxnSpPr/>
           <p:nvPr/>
         </p:nvCxnSpPr>
         <p:spPr>
           <a:xfrm>
-            <a:off x="868680" y="1024128"/>
-            <a:ext cx="566928" cy="0"/>
+            <a:off x="877824" y="6263640"/>
+            <a:ext cx="10436047" cy="0"/>
           </a:xfrm>
           <a:prstGeom prst="bentConnector3">
             <a:avLst/>
           </a:prstGeom>
-          <a:ln w="27940">
+          <a:ln w="9525">
             <a:solidFill>
-              <a:srgbClr val="1D1D1F"/>
+              <a:srgbClr val="D2D2D7"/>
             </a:solidFill>
           </a:ln>
         </p:spPr>
@@ -4332,14 +4581,14 @@
       </p:cxnSp>
       <p:sp>
         <p:nvSpPr>
-          <p:cNvPr id="5" name="TextBox 4"/>
+          <p:cNvPr id="7" name="TextBox 6"/>
           <p:cNvSpPr txBox="1"/>
           <p:nvPr/>
         </p:nvSpPr>
         <p:spPr>
           <a:xfrm>
-            <a:off x="868680" y="1417320"/>
-            <a:ext cx="10424160" cy="914400"/>
+            <a:off x="877824" y="6355080"/>
+            <a:ext cx="10436047" cy="320040"/>
           </a:xfrm>
           <a:prstGeom prst="rect">
             <a:avLst/>
@@ -4354,33 +4603,40 @@
           <a:p>
             <a:pPr algn="l">
               <a:lnSpc>
-                <a:spcPct val="115000"/>
+                <a:spcPct val="110000"/>
               </a:lnSpc>
             </a:pPr>
             <a:r>
-              <a:rPr sz="3800" b="1">
-                <a:solidFill>
-                  <a:srgbClr val="1D1D1F"/>
-                </a:solidFill>
-                <a:latin typeface="맑은 고딕"/>
-                <a:ea typeface="맑은 고딕"/>
-                <a:cs typeface="맑은 고딕"/>
-              </a:rPr>
-              <a:t>생각 → 지식 → 자산</a:t>
-            </a:r>
-          </a:p>
-        </p:txBody>
-      </p:sp>
-      <p:sp>
-        <p:nvSpPr>
-          <p:cNvPr id="6" name="TextBox 5"/>
+              <a:rPr sz="900" b="1">
+                <a:solidFill>
+                  <a:srgbClr val="6E6E73"/>
+                </a:solidFill>
+                <a:latin typeface="Pretendard"/>
+              </a:rPr>
+              <a:t>Aramirror</a:t>
+            </a:r>
+            <a:r>
+              <a:rPr sz="900" b="0">
+                <a:solidFill>
+                  <a:srgbClr val="6E6E73"/>
+                </a:solidFill>
+                <a:latin typeface="Pretendard"/>
+              </a:rPr>
+              <a:t>  — AI는 거울이 된다</a:t>
+            </a:r>
+          </a:p>
+        </p:txBody>
+      </p:sp>
+      <p:sp>
+        <p:nvSpPr>
+          <p:cNvPr id="8" name="TextBox 7"/>
           <p:cNvSpPr txBox="1"/>
           <p:nvPr/>
         </p:nvSpPr>
         <p:spPr>
           <a:xfrm>
-            <a:off x="868680" y="2514600"/>
-            <a:ext cx="10454335" cy="3291840"/>
+            <a:off x="877824" y="6355080"/>
+            <a:ext cx="10436047" cy="320040"/>
           </a:xfrm>
           <a:prstGeom prst="rect">
             <a:avLst/>
@@ -4388,308 +4644,24 @@
           <a:noFill/>
         </p:spPr>
         <p:txBody>
-          <a:bodyPr wrap="square" lIns="0" rIns="0" tIns="0" bIns="0">
-            <a:spAutoFit/>
-          </a:bodyPr>
-          <a:lstStyle/>
-          <a:p>
-            <a:pPr>
-              <a:lnSpc>
-                <a:spcPct val="112000"/>
-              </a:lnSpc>
-              <a:spcAft>
-                <a:spcPts val="1400"/>
-              </a:spcAft>
-            </a:pPr>
-            <a:r>
-              <a:rPr sz="1700" b="1">
-                <a:solidFill>
-                  <a:srgbClr val="1D1D1F"/>
-                </a:solidFill>
-                <a:latin typeface="맑은 고딕"/>
-                <a:ea typeface="맑은 고딕"/>
-                <a:cs typeface="맑은 고딕"/>
-              </a:rPr>
-              <a:t>—  </a:t>
-            </a:r>
-            <a:r>
-              <a:rPr sz="1700" b="1">
-                <a:solidFill>
-                  <a:srgbClr val="1D1D1F"/>
-                </a:solidFill>
-                <a:latin typeface="맑은 고딕"/>
-                <a:ea typeface="맑은 고딕"/>
-                <a:cs typeface="맑은 고딕"/>
-              </a:rPr>
-              <a:t>메모앱이 아니다.</a:t>
-            </a:r>
-            <a:r>
-              <a:rPr sz="1500" b="0">
-                <a:solidFill>
-                  <a:srgbClr val="6E6E73"/>
-                </a:solidFill>
-                <a:latin typeface="맑은 고딕"/>
-                <a:ea typeface="맑은 고딕"/>
-                <a:cs typeface="맑은 고딕"/>
-              </a:rPr>
-              <a:t>   내 생각이 값(자산)이 되는 환경.</a:t>
-            </a:r>
-          </a:p>
-          <a:p>
-            <a:pPr>
-              <a:lnSpc>
-                <a:spcPct val="112000"/>
-              </a:lnSpc>
-              <a:spcAft>
-                <a:spcPts val="1400"/>
-              </a:spcAft>
-            </a:pPr>
-            <a:r>
-              <a:rPr sz="1700" b="1">
-                <a:solidFill>
-                  <a:srgbClr val="1D1D1F"/>
-                </a:solidFill>
-                <a:latin typeface="맑은 고딕"/>
-                <a:ea typeface="맑은 고딕"/>
-                <a:cs typeface="맑은 고딕"/>
-              </a:rPr>
-              <a:t>—  </a:t>
-            </a:r>
-            <a:r>
-              <a:rPr sz="1700" b="1">
-                <a:solidFill>
-                  <a:srgbClr val="1D1D1F"/>
-                </a:solidFill>
-                <a:latin typeface="맑은 고딕"/>
-                <a:ea typeface="맑은 고딕"/>
-                <a:cs typeface="맑은 고딕"/>
-              </a:rPr>
-              <a:t>사고 — 던진다.</a:t>
-            </a:r>
-            <a:r>
-              <a:rPr sz="1500" b="0">
-                <a:solidFill>
-                  <a:srgbClr val="6E6E73"/>
-                </a:solidFill>
-                <a:latin typeface="맑은 고딕"/>
-                <a:ea typeface="맑은 고딕"/>
-                <a:cs typeface="맑은 고딕"/>
-              </a:rPr>
-              <a:t>   텔레그램으로 아무 때나. 입력 마찰 0.</a:t>
-            </a:r>
-          </a:p>
-          <a:p>
-            <a:pPr>
-              <a:lnSpc>
-                <a:spcPct val="112000"/>
-              </a:lnSpc>
-              <a:spcAft>
-                <a:spcPts val="1400"/>
-              </a:spcAft>
-            </a:pPr>
-            <a:r>
-              <a:rPr sz="1700" b="1">
-                <a:solidFill>
-                  <a:srgbClr val="1D1D1F"/>
-                </a:solidFill>
-                <a:latin typeface="맑은 고딕"/>
-                <a:ea typeface="맑은 고딕"/>
-                <a:cs typeface="맑은 고딕"/>
-              </a:rPr>
-              <a:t>—  </a:t>
-            </a:r>
-            <a:r>
-              <a:rPr sz="1700" b="1">
-                <a:solidFill>
-                  <a:srgbClr val="1D1D1F"/>
-                </a:solidFill>
-                <a:latin typeface="맑은 고딕"/>
-                <a:ea typeface="맑은 고딕"/>
-                <a:cs typeface="맑은 고딕"/>
-              </a:rPr>
-              <a:t>지식 — 엮인다.</a:t>
-            </a:r>
-            <a:r>
-              <a:rPr sz="1500" b="0">
-                <a:solidFill>
-                  <a:srgbClr val="6E6E73"/>
-                </a:solidFill>
-                <a:latin typeface="맑은 고딕"/>
-                <a:ea typeface="맑은 고딕"/>
-                <a:cs typeface="맑은 고딕"/>
-              </a:rPr>
-              <a:t>   밤마다 자동으로 연결·서술되어 위키로 승격.</a:t>
-            </a:r>
-          </a:p>
-          <a:p>
-            <a:pPr>
-              <a:lnSpc>
-                <a:spcPct val="112000"/>
-              </a:lnSpc>
-              <a:spcAft>
-                <a:spcPts val="1400"/>
-              </a:spcAft>
-            </a:pPr>
-            <a:r>
-              <a:rPr sz="1700" b="1">
-                <a:solidFill>
-                  <a:srgbClr val="1D1D1F"/>
-                </a:solidFill>
-                <a:latin typeface="맑은 고딕"/>
-                <a:ea typeface="맑은 고딕"/>
-                <a:cs typeface="맑은 고딕"/>
-              </a:rPr>
-              <a:t>—  </a:t>
-            </a:r>
-            <a:r>
-              <a:rPr sz="1700" b="1">
-                <a:solidFill>
-                  <a:srgbClr val="1D1D1F"/>
-                </a:solidFill>
-                <a:latin typeface="맑은 고딕"/>
-                <a:ea typeface="맑은 고딕"/>
-                <a:cs typeface="맑은 고딕"/>
-              </a:rPr>
-              <a:t>자산 — 발행된다.</a:t>
-            </a:r>
-            <a:r>
-              <a:rPr sz="1500" b="0">
-                <a:solidFill>
-                  <a:srgbClr val="6E6E73"/>
-                </a:solidFill>
-                <a:latin typeface="맑은 고딕"/>
-                <a:ea typeface="맑은 고딕"/>
-                <a:cs typeface="맑은 고딕"/>
-              </a:rPr>
-              <a:t>   성숙한 생각이 아라미러 사이트의 글·기록이 된다.</a:t>
-            </a:r>
-          </a:p>
-        </p:txBody>
-      </p:sp>
-      <p:cxnSp>
-        <p:nvCxnSpPr>
-          <p:cNvPr id="7" name="Connector 6"/>
-          <p:cNvCxnSpPr/>
-          <p:nvPr/>
-        </p:nvCxnSpPr>
-        <p:spPr>
-          <a:xfrm>
-            <a:off x="868680" y="6144768"/>
-            <a:ext cx="10454335" cy="0"/>
-          </a:xfrm>
-          <a:prstGeom prst="bentConnector3">
-            <a:avLst/>
-          </a:prstGeom>
-          <a:ln w="9525">
-            <a:solidFill>
-              <a:srgbClr val="D2D2D7"/>
-            </a:solidFill>
-          </a:ln>
-        </p:spPr>
-        <p:style>
-          <a:lnRef idx="2">
-            <a:schemeClr val="accent1"/>
-          </a:lnRef>
-          <a:fillRef idx="0">
-            <a:schemeClr val="accent1"/>
-          </a:fillRef>
-          <a:effectRef idx="1">
-            <a:schemeClr val="accent1"/>
-          </a:effectRef>
-          <a:fontRef idx="minor">
-            <a:schemeClr val="tx1"/>
-          </a:fontRef>
-        </p:style>
-      </p:cxnSp>
-      <p:sp>
-        <p:nvSpPr>
-          <p:cNvPr id="8" name="TextBox 7"/>
-          <p:cNvSpPr txBox="1"/>
-          <p:nvPr/>
-        </p:nvSpPr>
-        <p:spPr>
-          <a:xfrm>
-            <a:off x="868680" y="6236208"/>
-            <a:ext cx="7315200" cy="365760"/>
-          </a:xfrm>
-          <a:prstGeom prst="rect">
-            <a:avLst/>
-          </a:prstGeom>
-          <a:noFill/>
-        </p:spPr>
-        <p:txBody>
           <a:bodyPr wrap="square" anchor="t" lIns="0" rIns="0" tIns="0" bIns="0">
             <a:spAutoFit/>
           </a:bodyPr>
           <a:lstStyle/>
           <a:p>
-            <a:pPr algn="l">
+            <a:pPr algn="r">
               <a:lnSpc>
-                <a:spcPct val="115000"/>
+                <a:spcPct val="110000"/>
               </a:lnSpc>
             </a:pPr>
             <a:r>
-              <a:rPr sz="950" b="1">
+              <a:rPr sz="900" b="0">
                 <a:solidFill>
                   <a:srgbClr val="6E6E73"/>
                 </a:solidFill>
-                <a:latin typeface="맑은 고딕"/>
-                <a:ea typeface="맑은 고딕"/>
-                <a:cs typeface="맑은 고딕"/>
-              </a:rPr>
-              <a:t>Aramirror</a:t>
-            </a:r>
-            <a:r>
-              <a:rPr sz="950" b="0">
-                <a:solidFill>
-                  <a:srgbClr val="6E6E73"/>
-                </a:solidFill>
-                <a:latin typeface="맑은 고딕"/>
-                <a:ea typeface="맑은 고딕"/>
-                <a:cs typeface="맑은 고딕"/>
-              </a:rPr>
-              <a:t>  —  AI는 거울이 된다</a:t>
-            </a:r>
-          </a:p>
-        </p:txBody>
-      </p:sp>
-      <p:sp>
-        <p:nvSpPr>
-          <p:cNvPr id="9" name="TextBox 8"/>
-          <p:cNvSpPr txBox="1"/>
-          <p:nvPr/>
-        </p:nvSpPr>
-        <p:spPr>
-          <a:xfrm>
-            <a:off x="9494215" y="6236208"/>
-            <a:ext cx="1828800" cy="365760"/>
-          </a:xfrm>
-          <a:prstGeom prst="rect">
-            <a:avLst/>
-          </a:prstGeom>
-          <a:noFill/>
-        </p:spPr>
-        <p:txBody>
-          <a:bodyPr wrap="square" anchor="t" lIns="0" rIns="0" tIns="0" bIns="0">
-            <a:spAutoFit/>
-          </a:bodyPr>
-          <a:lstStyle/>
-          <a:p>
-            <a:pPr algn="r">
-              <a:lnSpc>
-                <a:spcPct val="115000"/>
-              </a:lnSpc>
-            </a:pPr>
-            <a:r>
-              <a:rPr sz="950" b="0">
-                <a:solidFill>
-                  <a:srgbClr val="6E6E73"/>
-                </a:solidFill>
-                <a:latin typeface="맑은 고딕"/>
-                <a:ea typeface="맑은 고딕"/>
-                <a:cs typeface="맑은 고딕"/>
-              </a:rPr>
-              <a:t>02 / 05</a:t>
+                <a:latin typeface="Pretendard"/>
+              </a:rPr>
+              <a:t>02 / 07</a:t>
             </a:r>
           </a:p>
         </p:txBody>
@@ -4714,25 +4686,63 @@
       <p:grpSpPr/>
       <p:sp>
         <p:nvSpPr>
-          <p:cNvPr id="2" name="Rectangle 1"/>
+          <p:cNvPr id="2" name="TextBox 1"/>
+          <p:cNvSpPr txBox="1"/>
+          <p:nvPr/>
+        </p:nvSpPr>
+        <p:spPr>
+          <a:xfrm>
+            <a:off x="877824" y="658368"/>
+            <a:ext cx="10436047" cy="365760"/>
+          </a:xfrm>
+          <a:prstGeom prst="rect">
+            <a:avLst/>
+          </a:prstGeom>
+          <a:noFill/>
+        </p:spPr>
+        <p:txBody>
+          <a:bodyPr wrap="square" anchor="t" lIns="0" rIns="0" tIns="0" bIns="0">
+            <a:spAutoFit/>
+          </a:bodyPr>
+          <a:lstStyle/>
+          <a:p>
+            <a:pPr algn="l">
+              <a:lnSpc>
+                <a:spcPct val="110000"/>
+              </a:lnSpc>
+            </a:pPr>
+            <a:r>
+              <a:rPr sz="1100" b="1">
+                <a:solidFill>
+                  <a:srgbClr val="6E6E73"/>
+                </a:solidFill>
+                <a:latin typeface="Pretendard"/>
+              </a:rPr>
+              <a:t>02 · WHAT — 내가 뒤집은 원칙</a:t>
+            </a:r>
+          </a:p>
+        </p:txBody>
+      </p:sp>
+      <p:sp>
+        <p:nvSpPr>
+          <p:cNvPr id="3" name="Rectangle 2"/>
           <p:cNvSpPr/>
           <p:nvPr/>
         </p:nvSpPr>
         <p:spPr>
           <a:xfrm>
-            <a:off x="0" y="0"/>
-            <a:ext cx="12191695" cy="6858000"/>
+            <a:off x="877824" y="1024128"/>
+            <a:ext cx="566928" cy="38100"/>
           </a:xfrm>
           <a:prstGeom prst="rect">
             <a:avLst/>
           </a:prstGeom>
           <a:solidFill>
-            <a:srgbClr val="FFFFFF"/>
+            <a:srgbClr val="1D1D1F"/>
           </a:solidFill>
           <a:ln>
             <a:noFill/>
           </a:ln>
-          <a:effectLst/>
         </p:spPr>
         <p:style>
           <a:lnRef idx="1">
@@ -4758,14 +4768,14 @@
       </p:sp>
       <p:sp>
         <p:nvSpPr>
-          <p:cNvPr id="3" name="TextBox 2"/>
+          <p:cNvPr id="4" name="TextBox 3"/>
           <p:cNvSpPr txBox="1"/>
           <p:nvPr/>
         </p:nvSpPr>
         <p:spPr>
           <a:xfrm>
-            <a:off x="868680" y="658368"/>
-            <a:ext cx="10058400" cy="365760"/>
+            <a:off x="877824" y="1234440"/>
+            <a:ext cx="10436047" cy="822960"/>
           </a:xfrm>
           <a:prstGeom prst="rect">
             <a:avLst/>
@@ -4780,40 +4790,209 @@
           <a:p>
             <a:pPr algn="l">
               <a:lnSpc>
-                <a:spcPct val="115000"/>
+                <a:spcPct val="110000"/>
               </a:lnSpc>
             </a:pPr>
             <a:r>
-              <a:rPr sz="1200" b="1">
+              <a:rPr sz="3400" b="1">
+                <a:solidFill>
+                  <a:srgbClr val="1D1D1F"/>
+                </a:solidFill>
+                <a:latin typeface="Pretendard"/>
+              </a:rPr>
+              <a:t>입력은 0, 정리는 AI, 소유는 나</a:t>
+            </a:r>
+          </a:p>
+        </p:txBody>
+      </p:sp>
+      <p:sp>
+        <p:nvSpPr>
+          <p:cNvPr id="5" name="TextBox 4"/>
+          <p:cNvSpPr txBox="1"/>
+          <p:nvPr/>
+        </p:nvSpPr>
+        <p:spPr>
+          <a:xfrm>
+            <a:off x="877824" y="2286000"/>
+            <a:ext cx="10436047" cy="3931920"/>
+          </a:xfrm>
+          <a:prstGeom prst="rect">
+            <a:avLst/>
+          </a:prstGeom>
+          <a:noFill/>
+        </p:spPr>
+        <p:txBody>
+          <a:bodyPr wrap="square" lIns="0" rIns="0" tIns="0" bIns="0">
+            <a:spAutoFit/>
+          </a:bodyPr>
+          <a:lstStyle/>
+          <a:p>
+            <a:pPr>
+              <a:lnSpc>
+                <a:spcPct val="124000"/>
+              </a:lnSpc>
+              <a:spcAft>
+                <a:spcPts val="1400"/>
+              </a:spcAft>
+            </a:pPr>
+            <a:r>
+              <a:rPr sz="1900" b="1">
+                <a:solidFill>
+                  <a:srgbClr val="1D1D1F"/>
+                </a:solidFill>
+                <a:latin typeface="Pretendard"/>
+              </a:rPr>
+              <a:t>—  </a:t>
+            </a:r>
+            <a:r>
+              <a:rPr sz="1900" b="1">
+                <a:solidFill>
+                  <a:srgbClr val="1D1D1F"/>
+                </a:solidFill>
+                <a:latin typeface="Pretendard"/>
+              </a:rPr>
+              <a:t>입력 마찰 0.  </a:t>
+            </a:r>
+            <a:r>
+              <a:rPr sz="1600">
                 <a:solidFill>
                   <a:srgbClr val="6E6E73"/>
                 </a:solidFill>
-                <a:latin typeface="맑은 고딕"/>
-                <a:ea typeface="맑은 고딕"/>
-                <a:cs typeface="맑은 고딕"/>
-              </a:rPr>
-              <a:t>02 · TODAY — 오늘 붙인 것</a:t>
+                <a:latin typeface="Pretendard"/>
+              </a:rPr>
+              <a:t>나는 텔레그램에 그냥 말만 던진다. 그날 저널에 자동으로 쌓인다.</a:t>
+            </a:r>
+          </a:p>
+          <a:p>
+            <a:pPr>
+              <a:lnSpc>
+                <a:spcPct val="124000"/>
+              </a:lnSpc>
+              <a:spcAft>
+                <a:spcPts val="1400"/>
+              </a:spcAft>
+            </a:pPr>
+            <a:r>
+              <a:rPr sz="1900" b="1">
+                <a:solidFill>
+                  <a:srgbClr val="1D1D1F"/>
+                </a:solidFill>
+                <a:latin typeface="Pretendard"/>
+              </a:rPr>
+              <a:t>—  </a:t>
+            </a:r>
+            <a:r>
+              <a:rPr sz="1900" b="1">
+                <a:solidFill>
+                  <a:srgbClr val="1D1D1F"/>
+                </a:solidFill>
+                <a:latin typeface="Pretendard"/>
+              </a:rPr>
+              <a:t>정리는 100% AI.  </a:t>
+            </a:r>
+            <a:r>
+              <a:rPr sz="1600">
+                <a:solidFill>
+                  <a:srgbClr val="6E6E73"/>
+                </a:solidFill>
+                <a:latin typeface="Pretendard"/>
+              </a:rPr>
+              <a:t>분류·연결·서술은 전부 AI. 밤마다 지난 기록과 자동으로 엮여 지식이 된다.</a:t>
+            </a:r>
+          </a:p>
+          <a:p>
+            <a:pPr>
+              <a:lnSpc>
+                <a:spcPct val="124000"/>
+              </a:lnSpc>
+              <a:spcAft>
+                <a:spcPts val="1400"/>
+              </a:spcAft>
+            </a:pPr>
+            <a:r>
+              <a:rPr sz="1900" b="1">
+                <a:solidFill>
+                  <a:srgbClr val="1D1D1F"/>
+                </a:solidFill>
+                <a:latin typeface="Pretendard"/>
+              </a:rPr>
+              <a:t>—  </a:t>
+            </a:r>
+            <a:r>
+              <a:rPr sz="1900" b="1">
+                <a:solidFill>
+                  <a:srgbClr val="1D1D1F"/>
+                </a:solidFill>
+                <a:latin typeface="Pretendard"/>
+              </a:rPr>
+              <a:t>소유권은 나에게.  </a:t>
+            </a:r>
+            <a:r>
+              <a:rPr sz="1600">
+                <a:solidFill>
+                  <a:srgbClr val="6E6E73"/>
+                </a:solidFill>
+                <a:latin typeface="Pretendard"/>
+              </a:rPr>
+              <a:t>AI는 편집자일 뿐, 내 생각은 내 것. 성숙하면 사이트의 글·기록으로 발행된다.</a:t>
+            </a:r>
+          </a:p>
+          <a:p>
+            <a:pPr>
+              <a:lnSpc>
+                <a:spcPct val="124000"/>
+              </a:lnSpc>
+              <a:spcAft>
+                <a:spcPts val="1400"/>
+              </a:spcAft>
+            </a:pPr>
+            <a:r>
+              <a:rPr sz="1900" b="1">
+                <a:solidFill>
+                  <a:srgbClr val="1D1D1F"/>
+                </a:solidFill>
+                <a:latin typeface="Pretendard"/>
+              </a:rPr>
+              <a:t>—  </a:t>
+            </a:r>
+            <a:r>
+              <a:rPr sz="1900" b="1">
+                <a:solidFill>
+                  <a:srgbClr val="1D1D1F"/>
+                </a:solidFill>
+                <a:latin typeface="Pretendard"/>
+              </a:rPr>
+              <a:t>The Wall — 생각의 벽.  </a:t>
+            </a:r>
+            <a:r>
+              <a:rPr sz="1600">
+                <a:solidFill>
+                  <a:srgbClr val="6E6E73"/>
+                </a:solidFill>
+                <a:latin typeface="Pretendard"/>
+              </a:rPr>
+              <a:t>내가 세운 원칙. 내 생각(자산)과 남에서 온 것(연료)을 절대 섞지 않는다.</a:t>
             </a:r>
           </a:p>
         </p:txBody>
       </p:sp>
       <p:cxnSp>
         <p:nvCxnSpPr>
-          <p:cNvPr id="4" name="Connector 3"/>
+          <p:cNvPr id="6" name="Connector 5"/>
           <p:cNvCxnSpPr/>
           <p:nvPr/>
         </p:nvCxnSpPr>
         <p:spPr>
           <a:xfrm>
-            <a:off x="868680" y="1024128"/>
-            <a:ext cx="566928" cy="0"/>
+            <a:off x="877824" y="6263640"/>
+            <a:ext cx="10436047" cy="0"/>
           </a:xfrm>
           <a:prstGeom prst="bentConnector3">
             <a:avLst/>
           </a:prstGeom>
-          <a:ln w="27940">
+          <a:ln w="9525">
             <a:solidFill>
-              <a:srgbClr val="1D1D1F"/>
+              <a:srgbClr val="D2D2D7"/>
             </a:solidFill>
           </a:ln>
         </p:spPr>
@@ -4834,14 +5013,14 @@
       </p:cxnSp>
       <p:sp>
         <p:nvSpPr>
-          <p:cNvPr id="5" name="TextBox 4"/>
+          <p:cNvPr id="7" name="TextBox 6"/>
           <p:cNvSpPr txBox="1"/>
           <p:nvPr/>
         </p:nvSpPr>
         <p:spPr>
           <a:xfrm>
-            <a:off x="868680" y="1417320"/>
-            <a:ext cx="10424160" cy="914400"/>
+            <a:off x="877824" y="6355080"/>
+            <a:ext cx="10436047" cy="320040"/>
           </a:xfrm>
           <a:prstGeom prst="rect">
             <a:avLst/>
@@ -4856,33 +5035,40 @@
           <a:p>
             <a:pPr algn="l">
               <a:lnSpc>
-                <a:spcPct val="115000"/>
+                <a:spcPct val="110000"/>
               </a:lnSpc>
             </a:pPr>
             <a:r>
-              <a:rPr sz="3800" b="1">
-                <a:solidFill>
-                  <a:srgbClr val="1D1D1F"/>
-                </a:solidFill>
-                <a:latin typeface="맑은 고딕"/>
-                <a:ea typeface="맑은 고딕"/>
-                <a:cs typeface="맑은 고딕"/>
-              </a:rPr>
-              <a:t>게시판과 관리자 CRUD</a:t>
-            </a:r>
-          </a:p>
-        </p:txBody>
-      </p:sp>
-      <p:sp>
-        <p:nvSpPr>
-          <p:cNvPr id="6" name="TextBox 5"/>
+              <a:rPr sz="900" b="1">
+                <a:solidFill>
+                  <a:srgbClr val="6E6E73"/>
+                </a:solidFill>
+                <a:latin typeface="Pretendard"/>
+              </a:rPr>
+              <a:t>Aramirror</a:t>
+            </a:r>
+            <a:r>
+              <a:rPr sz="900" b="0">
+                <a:solidFill>
+                  <a:srgbClr val="6E6E73"/>
+                </a:solidFill>
+                <a:latin typeface="Pretendard"/>
+              </a:rPr>
+              <a:t>  — AI는 거울이 된다</a:t>
+            </a:r>
+          </a:p>
+        </p:txBody>
+      </p:sp>
+      <p:sp>
+        <p:nvSpPr>
+          <p:cNvPr id="8" name="TextBox 7"/>
           <p:cNvSpPr txBox="1"/>
           <p:nvPr/>
         </p:nvSpPr>
         <p:spPr>
           <a:xfrm>
-            <a:off x="868680" y="2514600"/>
-            <a:ext cx="10454335" cy="3291840"/>
+            <a:off x="877824" y="6355080"/>
+            <a:ext cx="10436047" cy="320040"/>
           </a:xfrm>
           <a:prstGeom prst="rect">
             <a:avLst/>
@@ -4890,308 +5076,24 @@
           <a:noFill/>
         </p:spPr>
         <p:txBody>
-          <a:bodyPr wrap="square" lIns="0" rIns="0" tIns="0" bIns="0">
-            <a:spAutoFit/>
-          </a:bodyPr>
-          <a:lstStyle/>
-          <a:p>
-            <a:pPr>
-              <a:lnSpc>
-                <a:spcPct val="112000"/>
-              </a:lnSpc>
-              <a:spcAft>
-                <a:spcPts val="1400"/>
-              </a:spcAft>
-            </a:pPr>
-            <a:r>
-              <a:rPr sz="1700" b="1">
-                <a:solidFill>
-                  <a:srgbClr val="1D1D1F"/>
-                </a:solidFill>
-                <a:latin typeface="맑은 고딕"/>
-                <a:ea typeface="맑은 고딕"/>
-                <a:cs typeface="맑은 고딕"/>
-              </a:rPr>
-              <a:t>—  </a:t>
-            </a:r>
-            <a:r>
-              <a:rPr sz="1700" b="1">
-                <a:solidFill>
-                  <a:srgbClr val="1D1D1F"/>
-                </a:solidFill>
-                <a:latin typeface="맑은 고딕"/>
-                <a:ea typeface="맑은 고딕"/>
-                <a:cs typeface="맑은 고딕"/>
-              </a:rPr>
-              <a:t>출발점 — 이기적스폰지 공유회.</a:t>
-            </a:r>
-            <a:r>
-              <a:rPr sz="1500" b="0">
-                <a:solidFill>
-                  <a:srgbClr val="6E6E73"/>
-                </a:solidFill>
-                <a:latin typeface="맑은 고딕"/>
-                <a:ea typeface="맑은 고딕"/>
-                <a:cs typeface="맑은 고딕"/>
-              </a:rPr>
-              <a:t>   아젠다 ② 'KEY 연결 → CRUD 게시판'에서 시작.</a:t>
-            </a:r>
-          </a:p>
-          <a:p>
-            <a:pPr>
-              <a:lnSpc>
-                <a:spcPct val="112000"/>
-              </a:lnSpc>
-              <a:spcAft>
-                <a:spcPts val="1400"/>
-              </a:spcAft>
-            </a:pPr>
-            <a:r>
-              <a:rPr sz="1700" b="1">
-                <a:solidFill>
-                  <a:srgbClr val="1D1D1F"/>
-                </a:solidFill>
-                <a:latin typeface="맑은 고딕"/>
-                <a:ea typeface="맑은 고딕"/>
-                <a:cs typeface="맑은 고딕"/>
-              </a:rPr>
-              <a:t>—  </a:t>
-            </a:r>
-            <a:r>
-              <a:rPr sz="1700" b="1">
-                <a:solidFill>
-                  <a:srgbClr val="1D1D1F"/>
-                </a:solidFill>
-                <a:latin typeface="맑은 고딕"/>
-                <a:ea typeface="맑은 고딕"/>
-                <a:cs typeface="맑은 고딕"/>
-              </a:rPr>
-              <a:t>게시판 /board.</a:t>
-            </a:r>
-            <a:r>
-              <a:rPr sz="1500" b="0">
-                <a:solidFill>
-                  <a:srgbClr val="6E6E73"/>
-                </a:solidFill>
-                <a:latin typeface="맑은 고딕"/>
-                <a:ea typeface="맑은 고딕"/>
-                <a:cs typeface="맑은 고딕"/>
-              </a:rPr>
-              <a:t>   카테고리 분류 · 글 읽기. 공개 페이지.</a:t>
-            </a:r>
-          </a:p>
-          <a:p>
-            <a:pPr>
-              <a:lnSpc>
-                <a:spcPct val="112000"/>
-              </a:lnSpc>
-              <a:spcAft>
-                <a:spcPts val="1400"/>
-              </a:spcAft>
-            </a:pPr>
-            <a:r>
-              <a:rPr sz="1700" b="1">
-                <a:solidFill>
-                  <a:srgbClr val="1D1D1F"/>
-                </a:solidFill>
-                <a:latin typeface="맑은 고딕"/>
-                <a:ea typeface="맑은 고딕"/>
-                <a:cs typeface="맑은 고딕"/>
-              </a:rPr>
-              <a:t>—  </a:t>
-            </a:r>
-            <a:r>
-              <a:rPr sz="1700" b="1">
-                <a:solidFill>
-                  <a:srgbClr val="1D1D1F"/>
-                </a:solidFill>
-                <a:latin typeface="맑은 고딕"/>
-                <a:ea typeface="맑은 고딕"/>
-                <a:cs typeface="맑은 고딕"/>
-              </a:rPr>
-              <a:t>관리자 /admin.</a:t>
-            </a:r>
-            <a:r>
-              <a:rPr sz="1500" b="0">
-                <a:solidFill>
-                  <a:srgbClr val="6E6E73"/>
-                </a:solidFill>
-                <a:latin typeface="맑은 고딕"/>
-                <a:ea typeface="맑은 고딕"/>
-                <a:cs typeface="맑은 고딕"/>
-              </a:rPr>
-              <a:t>   글 생성·수정·삭제, 웹페이지 상위 관리, 백업 (암호 게이트).</a:t>
-            </a:r>
-          </a:p>
-          <a:p>
-            <a:pPr>
-              <a:lnSpc>
-                <a:spcPct val="112000"/>
-              </a:lnSpc>
-              <a:spcAft>
-                <a:spcPts val="1400"/>
-              </a:spcAft>
-            </a:pPr>
-            <a:r>
-              <a:rPr sz="1700" b="1">
-                <a:solidFill>
-                  <a:srgbClr val="1D1D1F"/>
-                </a:solidFill>
-                <a:latin typeface="맑은 고딕"/>
-                <a:ea typeface="맑은 고딕"/>
-                <a:cs typeface="맑은 고딕"/>
-              </a:rPr>
-              <a:t>—  </a:t>
-            </a:r>
-            <a:r>
-              <a:rPr sz="1700" b="1">
-                <a:solidFill>
-                  <a:srgbClr val="1D1D1F"/>
-                </a:solidFill>
-                <a:latin typeface="맑은 고딕"/>
-                <a:ea typeface="맑은 고딕"/>
-                <a:cs typeface="맑은 고딕"/>
-              </a:rPr>
-              <a:t>정적 사이트에서 실제 동작.</a:t>
-            </a:r>
-            <a:r>
-              <a:rPr sz="1500" b="0">
-                <a:solidFill>
-                  <a:srgbClr val="6E6E73"/>
-                </a:solidFill>
-                <a:latin typeface="맑은 고딕"/>
-                <a:ea typeface="맑은 고딕"/>
-                <a:cs typeface="맑은 고딕"/>
-              </a:rPr>
-              <a:t>   지금은 브라우저 저장 → 서버 승격 준비 완료.</a:t>
-            </a:r>
-          </a:p>
-        </p:txBody>
-      </p:sp>
-      <p:cxnSp>
-        <p:nvCxnSpPr>
-          <p:cNvPr id="7" name="Connector 6"/>
-          <p:cNvCxnSpPr/>
-          <p:nvPr/>
-        </p:nvCxnSpPr>
-        <p:spPr>
-          <a:xfrm>
-            <a:off x="868680" y="6144768"/>
-            <a:ext cx="10454335" cy="0"/>
-          </a:xfrm>
-          <a:prstGeom prst="bentConnector3">
-            <a:avLst/>
-          </a:prstGeom>
-          <a:ln w="9525">
-            <a:solidFill>
-              <a:srgbClr val="D2D2D7"/>
-            </a:solidFill>
-          </a:ln>
-        </p:spPr>
-        <p:style>
-          <a:lnRef idx="2">
-            <a:schemeClr val="accent1"/>
-          </a:lnRef>
-          <a:fillRef idx="0">
-            <a:schemeClr val="accent1"/>
-          </a:fillRef>
-          <a:effectRef idx="1">
-            <a:schemeClr val="accent1"/>
-          </a:effectRef>
-          <a:fontRef idx="minor">
-            <a:schemeClr val="tx1"/>
-          </a:fontRef>
-        </p:style>
-      </p:cxnSp>
-      <p:sp>
-        <p:nvSpPr>
-          <p:cNvPr id="8" name="TextBox 7"/>
-          <p:cNvSpPr txBox="1"/>
-          <p:nvPr/>
-        </p:nvSpPr>
-        <p:spPr>
-          <a:xfrm>
-            <a:off x="868680" y="6236208"/>
-            <a:ext cx="7315200" cy="365760"/>
-          </a:xfrm>
-          <a:prstGeom prst="rect">
-            <a:avLst/>
-          </a:prstGeom>
-          <a:noFill/>
-        </p:spPr>
-        <p:txBody>
           <a:bodyPr wrap="square" anchor="t" lIns="0" rIns="0" tIns="0" bIns="0">
             <a:spAutoFit/>
           </a:bodyPr>
           <a:lstStyle/>
           <a:p>
-            <a:pPr algn="l">
+            <a:pPr algn="r">
               <a:lnSpc>
-                <a:spcPct val="115000"/>
+                <a:spcPct val="110000"/>
               </a:lnSpc>
             </a:pPr>
             <a:r>
-              <a:rPr sz="950" b="1">
+              <a:rPr sz="900" b="0">
                 <a:solidFill>
                   <a:srgbClr val="6E6E73"/>
                 </a:solidFill>
-                <a:latin typeface="맑은 고딕"/>
-                <a:ea typeface="맑은 고딕"/>
-                <a:cs typeface="맑은 고딕"/>
-              </a:rPr>
-              <a:t>Aramirror</a:t>
-            </a:r>
-            <a:r>
-              <a:rPr sz="950" b="0">
-                <a:solidFill>
-                  <a:srgbClr val="6E6E73"/>
-                </a:solidFill>
-                <a:latin typeface="맑은 고딕"/>
-                <a:ea typeface="맑은 고딕"/>
-                <a:cs typeface="맑은 고딕"/>
-              </a:rPr>
-              <a:t>  —  AI는 거울이 된다</a:t>
-            </a:r>
-          </a:p>
-        </p:txBody>
-      </p:sp>
-      <p:sp>
-        <p:nvSpPr>
-          <p:cNvPr id="9" name="TextBox 8"/>
-          <p:cNvSpPr txBox="1"/>
-          <p:nvPr/>
-        </p:nvSpPr>
-        <p:spPr>
-          <a:xfrm>
-            <a:off x="9494215" y="6236208"/>
-            <a:ext cx="1828800" cy="365760"/>
-          </a:xfrm>
-          <a:prstGeom prst="rect">
-            <a:avLst/>
-          </a:prstGeom>
-          <a:noFill/>
-        </p:spPr>
-        <p:txBody>
-          <a:bodyPr wrap="square" anchor="t" lIns="0" rIns="0" tIns="0" bIns="0">
-            <a:spAutoFit/>
-          </a:bodyPr>
-          <a:lstStyle/>
-          <a:p>
-            <a:pPr algn="r">
-              <a:lnSpc>
-                <a:spcPct val="115000"/>
-              </a:lnSpc>
-            </a:pPr>
-            <a:r>
-              <a:rPr sz="950" b="0">
-                <a:solidFill>
-                  <a:srgbClr val="6E6E73"/>
-                </a:solidFill>
-                <a:latin typeface="맑은 고딕"/>
-                <a:ea typeface="맑은 고딕"/>
-                <a:cs typeface="맑은 고딕"/>
-              </a:rPr>
-              <a:t>03 / 05</a:t>
+                <a:latin typeface="Pretendard"/>
+              </a:rPr>
+              <a:t>03 / 07</a:t>
             </a:r>
           </a:p>
         </p:txBody>
@@ -5216,25 +5118,63 @@
       <p:grpSpPr/>
       <p:sp>
         <p:nvSpPr>
-          <p:cNvPr id="2" name="Rectangle 1"/>
+          <p:cNvPr id="2" name="TextBox 1"/>
+          <p:cNvSpPr txBox="1"/>
+          <p:nvPr/>
+        </p:nvSpPr>
+        <p:spPr>
+          <a:xfrm>
+            <a:off x="877824" y="658368"/>
+            <a:ext cx="10436047" cy="365760"/>
+          </a:xfrm>
+          <a:prstGeom prst="rect">
+            <a:avLst/>
+          </a:prstGeom>
+          <a:noFill/>
+        </p:spPr>
+        <p:txBody>
+          <a:bodyPr wrap="square" anchor="t" lIns="0" rIns="0" tIns="0" bIns="0">
+            <a:spAutoFit/>
+          </a:bodyPr>
+          <a:lstStyle/>
+          <a:p>
+            <a:pPr algn="l">
+              <a:lnSpc>
+                <a:spcPct val="110000"/>
+              </a:lnSpc>
+            </a:pPr>
+            <a:r>
+              <a:rPr sz="1100" b="1">
+                <a:solidFill>
+                  <a:srgbClr val="6E6E73"/>
+                </a:solidFill>
+                <a:latin typeface="Pretendard"/>
+              </a:rPr>
+              <a:t>03 · HOW — 만들며 부딪힌 벽</a:t>
+            </a:r>
+          </a:p>
+        </p:txBody>
+      </p:sp>
+      <p:sp>
+        <p:nvSpPr>
+          <p:cNvPr id="3" name="Rectangle 2"/>
           <p:cNvSpPr/>
           <p:nvPr/>
         </p:nvSpPr>
         <p:spPr>
           <a:xfrm>
-            <a:off x="0" y="0"/>
-            <a:ext cx="12191695" cy="6858000"/>
+            <a:off x="877824" y="1024128"/>
+            <a:ext cx="566928" cy="38100"/>
           </a:xfrm>
           <a:prstGeom prst="rect">
             <a:avLst/>
           </a:prstGeom>
           <a:solidFill>
-            <a:srgbClr val="FFFFFF"/>
+            <a:srgbClr val="1D1D1F"/>
           </a:solidFill>
           <a:ln>
             <a:noFill/>
           </a:ln>
-          <a:effectLst/>
         </p:spPr>
         <p:style>
           <a:lnRef idx="1">
@@ -5260,14 +5200,14 @@
       </p:sp>
       <p:sp>
         <p:nvSpPr>
-          <p:cNvPr id="3" name="TextBox 2"/>
+          <p:cNvPr id="4" name="TextBox 3"/>
           <p:cNvSpPr txBox="1"/>
           <p:nvPr/>
         </p:nvSpPr>
         <p:spPr>
           <a:xfrm>
-            <a:off x="868680" y="658368"/>
-            <a:ext cx="10058400" cy="365760"/>
+            <a:off x="877824" y="1234440"/>
+            <a:ext cx="10436047" cy="822960"/>
           </a:xfrm>
           <a:prstGeom prst="rect">
             <a:avLst/>
@@ -5282,40 +5222,209 @@
           <a:p>
             <a:pPr algn="l">
               <a:lnSpc>
-                <a:spcPct val="115000"/>
+                <a:spcPct val="110000"/>
               </a:lnSpc>
             </a:pPr>
             <a:r>
-              <a:rPr sz="1200" b="1">
+              <a:rPr sz="3400" b="1">
+                <a:solidFill>
+                  <a:srgbClr val="1D1D1F"/>
+                </a:solidFill>
+                <a:latin typeface="Pretendard"/>
+              </a:rPr>
+              <a:t>직접 부딪히고, 직접 고쳤다</a:t>
+            </a:r>
+          </a:p>
+        </p:txBody>
+      </p:sp>
+      <p:sp>
+        <p:nvSpPr>
+          <p:cNvPr id="5" name="TextBox 4"/>
+          <p:cNvSpPr txBox="1"/>
+          <p:nvPr/>
+        </p:nvSpPr>
+        <p:spPr>
+          <a:xfrm>
+            <a:off x="877824" y="2286000"/>
+            <a:ext cx="10436047" cy="3931920"/>
+          </a:xfrm>
+          <a:prstGeom prst="rect">
+            <a:avLst/>
+          </a:prstGeom>
+          <a:noFill/>
+        </p:spPr>
+        <p:txBody>
+          <a:bodyPr wrap="square" lIns="0" rIns="0" tIns="0" bIns="0">
+            <a:spAutoFit/>
+          </a:bodyPr>
+          <a:lstStyle/>
+          <a:p>
+            <a:pPr>
+              <a:lnSpc>
+                <a:spcPct val="124000"/>
+              </a:lnSpc>
+              <a:spcAft>
+                <a:spcPts val="1400"/>
+              </a:spcAft>
+            </a:pPr>
+            <a:r>
+              <a:rPr sz="1900" b="1">
+                <a:solidFill>
+                  <a:srgbClr val="1D1D1F"/>
+                </a:solidFill>
+                <a:latin typeface="Pretendard"/>
+              </a:rPr>
+              <a:t>—  </a:t>
+            </a:r>
+            <a:r>
+              <a:rPr sz="1900" b="1">
+                <a:solidFill>
+                  <a:srgbClr val="1D1D1F"/>
+                </a:solidFill>
+                <a:latin typeface="Pretendard"/>
+              </a:rPr>
+              <a:t>"AI가 나를 대신하나?" 불안.  </a:t>
+            </a:r>
+            <a:r>
+              <a:rPr sz="1600">
                 <a:solidFill>
                   <a:srgbClr val="6E6E73"/>
                 </a:solidFill>
-                <a:latin typeface="맑은 고딕"/>
-                <a:ea typeface="맑은 고딕"/>
-                <a:cs typeface="맑은 고딕"/>
-              </a:rPr>
-              <a:t>03 · HOW — 어떻게 만들었나</a:t>
+                <a:latin typeface="Pretendard"/>
+              </a:rPr>
+              <a:t>가장 먼저 부딪힌 벽. 한 문장으로 매듭지었다 — 대신하지 않는다, 거울이 된다.</a:t>
+            </a:r>
+          </a:p>
+          <a:p>
+            <a:pPr>
+              <a:lnSpc>
+                <a:spcPct val="124000"/>
+              </a:lnSpc>
+              <a:spcAft>
+                <a:spcPts val="1400"/>
+              </a:spcAft>
+            </a:pPr>
+            <a:r>
+              <a:rPr sz="1900" b="1">
+                <a:solidFill>
+                  <a:srgbClr val="1D1D1F"/>
+                </a:solidFill>
+                <a:latin typeface="Pretendard"/>
+              </a:rPr>
+              <a:t>—  </a:t>
+            </a:r>
+            <a:r>
+              <a:rPr sz="1900" b="1">
+                <a:solidFill>
+                  <a:srgbClr val="1D1D1F"/>
+                </a:solidFill>
+                <a:latin typeface="Pretendard"/>
+              </a:rPr>
+              <a:t>봇이 자꾸 죽었다.  </a:t>
+            </a:r>
+            <a:r>
+              <a:rPr sz="1600">
+                <a:solidFill>
+                  <a:srgbClr val="6E6E73"/>
+                </a:solidFill>
+                <a:latin typeface="Pretendard"/>
+              </a:rPr>
+              <a:t>일반 창·headless로는 즉시 꺼짐. winpty로 감싸고 자동시작 걸어 24시간 살렸다.</a:t>
+            </a:r>
+          </a:p>
+          <a:p>
+            <a:pPr>
+              <a:lnSpc>
+                <a:spcPct val="124000"/>
+              </a:lnSpc>
+              <a:spcAft>
+                <a:spcPts val="1400"/>
+              </a:spcAft>
+            </a:pPr>
+            <a:r>
+              <a:rPr sz="1900" b="1">
+                <a:solidFill>
+                  <a:srgbClr val="1D1D1F"/>
+                </a:solidFill>
+                <a:latin typeface="Pretendard"/>
+              </a:rPr>
+              <a:t>—  </a:t>
+            </a:r>
+            <a:r>
+              <a:rPr sz="1900" b="1">
+                <a:solidFill>
+                  <a:srgbClr val="1D1D1F"/>
+                </a:solidFill>
+                <a:latin typeface="Pretendard"/>
+              </a:rPr>
+              <a:t>배포가 깨졌다.  </a:t>
+            </a:r>
+            <a:r>
+              <a:rPr sz="1600">
+                <a:solidFill>
+                  <a:srgbClr val="6E6E73"/>
+                </a:solidFill>
+                <a:latin typeface="Pretendard"/>
+              </a:rPr>
+              <a:t>모바일·PC에서 디자인이 무너짐. 흑백 미니멀로 전면 개편, 스크린샷 자가검수 후 재배포.</a:t>
+            </a:r>
+          </a:p>
+          <a:p>
+            <a:pPr>
+              <a:lnSpc>
+                <a:spcPct val="124000"/>
+              </a:lnSpc>
+              <a:spcAft>
+                <a:spcPts val="1400"/>
+              </a:spcAft>
+            </a:pPr>
+            <a:r>
+              <a:rPr sz="1900" b="1">
+                <a:solidFill>
+                  <a:srgbClr val="1D1D1F"/>
+                </a:solidFill>
+                <a:latin typeface="Pretendard"/>
+              </a:rPr>
+              <a:t>—  </a:t>
+            </a:r>
+            <a:r>
+              <a:rPr sz="1900" b="1">
+                <a:solidFill>
+                  <a:srgbClr val="1D1D1F"/>
+                </a:solidFill>
+                <a:latin typeface="Pretendard"/>
+              </a:rPr>
+              <a:t>손으로 다 겪었다.  </a:t>
+            </a:r>
+            <a:r>
+              <a:rPr sz="1600">
+                <a:solidFill>
+                  <a:srgbClr val="6E6E73"/>
+                </a:solidFill>
+                <a:latin typeface="Pretendard"/>
+              </a:rPr>
+              <a:t>부딪히고 고치는 그 과정이, 이걸 진짜 '내 것'으로 만든 순간이었다.</a:t>
             </a:r>
           </a:p>
         </p:txBody>
       </p:sp>
       <p:cxnSp>
         <p:nvCxnSpPr>
-          <p:cNvPr id="4" name="Connector 3"/>
+          <p:cNvPr id="6" name="Connector 5"/>
           <p:cNvCxnSpPr/>
           <p:nvPr/>
         </p:nvCxnSpPr>
         <p:spPr>
           <a:xfrm>
-            <a:off x="868680" y="1024128"/>
-            <a:ext cx="566928" cy="0"/>
+            <a:off x="877824" y="6263640"/>
+            <a:ext cx="10436047" cy="0"/>
           </a:xfrm>
           <a:prstGeom prst="bentConnector3">
             <a:avLst/>
           </a:prstGeom>
-          <a:ln w="27940">
+          <a:ln w="9525">
             <a:solidFill>
-              <a:srgbClr val="1D1D1F"/>
+              <a:srgbClr val="D2D2D7"/>
             </a:solidFill>
           </a:ln>
         </p:spPr>
@@ -5336,14 +5445,14 @@
       </p:cxnSp>
       <p:sp>
         <p:nvSpPr>
-          <p:cNvPr id="5" name="TextBox 4"/>
+          <p:cNvPr id="7" name="TextBox 6"/>
           <p:cNvSpPr txBox="1"/>
           <p:nvPr/>
         </p:nvSpPr>
         <p:spPr>
           <a:xfrm>
-            <a:off x="868680" y="1417320"/>
-            <a:ext cx="10424160" cy="914400"/>
+            <a:off x="877824" y="6355080"/>
+            <a:ext cx="10436047" cy="320040"/>
           </a:xfrm>
           <a:prstGeom prst="rect">
             <a:avLst/>
@@ -5358,33 +5467,40 @@
           <a:p>
             <a:pPr algn="l">
               <a:lnSpc>
-                <a:spcPct val="115000"/>
+                <a:spcPct val="110000"/>
               </a:lnSpc>
             </a:pPr>
             <a:r>
-              <a:rPr sz="3400" b="1">
-                <a:solidFill>
-                  <a:srgbClr val="1D1D1F"/>
-                </a:solidFill>
-                <a:latin typeface="맑은 고딕"/>
-                <a:ea typeface="맑은 고딕"/>
-                <a:cs typeface="맑은 고딕"/>
-              </a:rPr>
-              <a:t>재활용이 자동화의 핵심 = 스킬</a:t>
-            </a:r>
-          </a:p>
-        </p:txBody>
-      </p:sp>
-      <p:sp>
-        <p:nvSpPr>
-          <p:cNvPr id="6" name="TextBox 5"/>
+              <a:rPr sz="900" b="1">
+                <a:solidFill>
+                  <a:srgbClr val="6E6E73"/>
+                </a:solidFill>
+                <a:latin typeface="Pretendard"/>
+              </a:rPr>
+              <a:t>Aramirror</a:t>
+            </a:r>
+            <a:r>
+              <a:rPr sz="900" b="0">
+                <a:solidFill>
+                  <a:srgbClr val="6E6E73"/>
+                </a:solidFill>
+                <a:latin typeface="Pretendard"/>
+              </a:rPr>
+              <a:t>  — AI는 거울이 된다</a:t>
+            </a:r>
+          </a:p>
+        </p:txBody>
+      </p:sp>
+      <p:sp>
+        <p:nvSpPr>
+          <p:cNvPr id="8" name="TextBox 7"/>
           <p:cNvSpPr txBox="1"/>
           <p:nvPr/>
         </p:nvSpPr>
         <p:spPr>
           <a:xfrm>
-            <a:off x="868680" y="2514600"/>
-            <a:ext cx="10454335" cy="3291840"/>
+            <a:off x="877824" y="6355080"/>
+            <a:ext cx="10436047" cy="320040"/>
           </a:xfrm>
           <a:prstGeom prst="rect">
             <a:avLst/>
@@ -5392,308 +5508,24 @@
           <a:noFill/>
         </p:spPr>
         <p:txBody>
-          <a:bodyPr wrap="square" lIns="0" rIns="0" tIns="0" bIns="0">
-            <a:spAutoFit/>
-          </a:bodyPr>
-          <a:lstStyle/>
-          <a:p>
-            <a:pPr>
-              <a:lnSpc>
-                <a:spcPct val="112000"/>
-              </a:lnSpc>
-              <a:spcAft>
-                <a:spcPts val="1400"/>
-              </a:spcAft>
-            </a:pPr>
-            <a:r>
-              <a:rPr sz="1700" b="1">
-                <a:solidFill>
-                  <a:srgbClr val="1D1D1F"/>
-                </a:solidFill>
-                <a:latin typeface="맑은 고딕"/>
-                <a:ea typeface="맑은 고딕"/>
-                <a:cs typeface="맑은 고딕"/>
-              </a:rPr>
-              <a:t>—  </a:t>
-            </a:r>
-            <a:r>
-              <a:rPr sz="1700" b="1">
-                <a:solidFill>
-                  <a:srgbClr val="1D1D1F"/>
-                </a:solidFill>
-                <a:latin typeface="맑은 고딕"/>
-                <a:ea typeface="맑은 고딕"/>
-                <a:cs typeface="맑은 고딕"/>
-              </a:rPr>
-              <a:t>서브에이전트로 정리.</a:t>
-            </a:r>
-            <a:r>
-              <a:rPr sz="1500" b="0">
-                <a:solidFill>
-                  <a:srgbClr val="6E6E73"/>
-                </a:solidFill>
-                <a:latin typeface="맑은 고딕"/>
-                <a:ea typeface="맑은 고딕"/>
-                <a:cs typeface="맑은 고딕"/>
-              </a:rPr>
-              <a:t>   공유회 스크린샷 32장을 병렬로 MECE하게 요약.</a:t>
-            </a:r>
-          </a:p>
-          <a:p>
-            <a:pPr>
-              <a:lnSpc>
-                <a:spcPct val="112000"/>
-              </a:lnSpc>
-              <a:spcAft>
-                <a:spcPts val="1400"/>
-              </a:spcAft>
-            </a:pPr>
-            <a:r>
-              <a:rPr sz="1700" b="1">
-                <a:solidFill>
-                  <a:srgbClr val="1D1D1F"/>
-                </a:solidFill>
-                <a:latin typeface="맑은 고딕"/>
-                <a:ea typeface="맑은 고딕"/>
-                <a:cs typeface="맑은 고딕"/>
-              </a:rPr>
-              <a:t>—  </a:t>
-            </a:r>
-            <a:r>
-              <a:rPr sz="1700" b="1">
-                <a:solidFill>
-                  <a:srgbClr val="1D1D1F"/>
-                </a:solidFill>
-                <a:latin typeface="맑은 고딕"/>
-                <a:ea typeface="맑은 고딕"/>
-                <a:cs typeface="맑은 고딕"/>
-              </a:rPr>
-              <a:t>홈페이지 톤 그대로.</a:t>
-            </a:r>
-            <a:r>
-              <a:rPr sz="1500" b="0">
-                <a:solidFill>
-                  <a:srgbClr val="6E6E73"/>
-                </a:solidFill>
-                <a:latin typeface="맑은 고딕"/>
-                <a:ea typeface="맑은 고딕"/>
-                <a:cs typeface="맑은 고딕"/>
-              </a:rPr>
-              <a:t>   블랙&amp;화이트, 여백의 미. 잘 만든 디자인을 카피해 배운다.</a:t>
-            </a:r>
-          </a:p>
-          <a:p>
-            <a:pPr>
-              <a:lnSpc>
-                <a:spcPct val="112000"/>
-              </a:lnSpc>
-              <a:spcAft>
-                <a:spcPts val="1400"/>
-              </a:spcAft>
-            </a:pPr>
-            <a:r>
-              <a:rPr sz="1700" b="1">
-                <a:solidFill>
-                  <a:srgbClr val="1D1D1F"/>
-                </a:solidFill>
-                <a:latin typeface="맑은 고딕"/>
-                <a:ea typeface="맑은 고딕"/>
-                <a:cs typeface="맑은 고딕"/>
-              </a:rPr>
-              <a:t>—  </a:t>
-            </a:r>
-            <a:r>
-              <a:rPr sz="1700" b="1">
-                <a:solidFill>
-                  <a:srgbClr val="1D1D1F"/>
-                </a:solidFill>
-                <a:latin typeface="맑은 고딕"/>
-                <a:ea typeface="맑은 고딕"/>
-                <a:cs typeface="맑은 고딕"/>
-              </a:rPr>
-              <a:t>스크린샷 자가검수.</a:t>
-            </a:r>
-            <a:r>
-              <a:rPr sz="1500" b="0">
-                <a:solidFill>
-                  <a:srgbClr val="6E6E73"/>
-                </a:solidFill>
-                <a:latin typeface="맑은 고딕"/>
-                <a:ea typeface="맑은 고딕"/>
-                <a:cs typeface="맑은 고딕"/>
-              </a:rPr>
-              <a:t>   실제 버그 2개 발견·수정 (빈 모달 · 재방문 TDZ 에러).</a:t>
-            </a:r>
-          </a:p>
-          <a:p>
-            <a:pPr>
-              <a:lnSpc>
-                <a:spcPct val="112000"/>
-              </a:lnSpc>
-              <a:spcAft>
-                <a:spcPts val="1400"/>
-              </a:spcAft>
-            </a:pPr>
-            <a:r>
-              <a:rPr sz="1700" b="1">
-                <a:solidFill>
-                  <a:srgbClr val="1D1D1F"/>
-                </a:solidFill>
-                <a:latin typeface="맑은 고딕"/>
-                <a:ea typeface="맑은 고딕"/>
-                <a:cs typeface="맑은 고딕"/>
-              </a:rPr>
-              <a:t>—  </a:t>
-            </a:r>
-            <a:r>
-              <a:rPr sz="1700" b="1">
-                <a:solidFill>
-                  <a:srgbClr val="1D1D1F"/>
-                </a:solidFill>
-                <a:latin typeface="맑은 고딕"/>
-                <a:ea typeface="맑은 고딕"/>
-                <a:cs typeface="맑은 고딕"/>
-              </a:rPr>
-              <a:t>안전 배포.</a:t>
-            </a:r>
-            <a:r>
-              <a:rPr sz="1500" b="0">
-                <a:solidFill>
-                  <a:srgbClr val="6E6E73"/>
-                </a:solidFill>
-                <a:latin typeface="맑은 고딕"/>
-                <a:ea typeface="맑은 고딕"/>
-                <a:cs typeface="맑은 고딕"/>
-              </a:rPr>
-              <a:t>   gh-pages 배포하되 기존 앱(/me·/os)은 보존.</a:t>
-            </a:r>
-          </a:p>
-        </p:txBody>
-      </p:sp>
-      <p:cxnSp>
-        <p:nvCxnSpPr>
-          <p:cNvPr id="7" name="Connector 6"/>
-          <p:cNvCxnSpPr/>
-          <p:nvPr/>
-        </p:nvCxnSpPr>
-        <p:spPr>
-          <a:xfrm>
-            <a:off x="868680" y="6144768"/>
-            <a:ext cx="10454335" cy="0"/>
-          </a:xfrm>
-          <a:prstGeom prst="bentConnector3">
-            <a:avLst/>
-          </a:prstGeom>
-          <a:ln w="9525">
-            <a:solidFill>
-              <a:srgbClr val="D2D2D7"/>
-            </a:solidFill>
-          </a:ln>
-        </p:spPr>
-        <p:style>
-          <a:lnRef idx="2">
-            <a:schemeClr val="accent1"/>
-          </a:lnRef>
-          <a:fillRef idx="0">
-            <a:schemeClr val="accent1"/>
-          </a:fillRef>
-          <a:effectRef idx="1">
-            <a:schemeClr val="accent1"/>
-          </a:effectRef>
-          <a:fontRef idx="minor">
-            <a:schemeClr val="tx1"/>
-          </a:fontRef>
-        </p:style>
-      </p:cxnSp>
-      <p:sp>
-        <p:nvSpPr>
-          <p:cNvPr id="8" name="TextBox 7"/>
-          <p:cNvSpPr txBox="1"/>
-          <p:nvPr/>
-        </p:nvSpPr>
-        <p:spPr>
-          <a:xfrm>
-            <a:off x="868680" y="6236208"/>
-            <a:ext cx="7315200" cy="365760"/>
-          </a:xfrm>
-          <a:prstGeom prst="rect">
-            <a:avLst/>
-          </a:prstGeom>
-          <a:noFill/>
-        </p:spPr>
-        <p:txBody>
           <a:bodyPr wrap="square" anchor="t" lIns="0" rIns="0" tIns="0" bIns="0">
             <a:spAutoFit/>
           </a:bodyPr>
           <a:lstStyle/>
           <a:p>
-            <a:pPr algn="l">
+            <a:pPr algn="r">
               <a:lnSpc>
-                <a:spcPct val="115000"/>
+                <a:spcPct val="110000"/>
               </a:lnSpc>
             </a:pPr>
             <a:r>
-              <a:rPr sz="950" b="1">
+              <a:rPr sz="900" b="0">
                 <a:solidFill>
                   <a:srgbClr val="6E6E73"/>
                 </a:solidFill>
-                <a:latin typeface="맑은 고딕"/>
-                <a:ea typeface="맑은 고딕"/>
-                <a:cs typeface="맑은 고딕"/>
-              </a:rPr>
-              <a:t>Aramirror</a:t>
-            </a:r>
-            <a:r>
-              <a:rPr sz="950" b="0">
-                <a:solidFill>
-                  <a:srgbClr val="6E6E73"/>
-                </a:solidFill>
-                <a:latin typeface="맑은 고딕"/>
-                <a:ea typeface="맑은 고딕"/>
-                <a:cs typeface="맑은 고딕"/>
-              </a:rPr>
-              <a:t>  —  AI는 거울이 된다</a:t>
-            </a:r>
-          </a:p>
-        </p:txBody>
-      </p:sp>
-      <p:sp>
-        <p:nvSpPr>
-          <p:cNvPr id="9" name="TextBox 8"/>
-          <p:cNvSpPr txBox="1"/>
-          <p:nvPr/>
-        </p:nvSpPr>
-        <p:spPr>
-          <a:xfrm>
-            <a:off x="9494215" y="6236208"/>
-            <a:ext cx="1828800" cy="365760"/>
-          </a:xfrm>
-          <a:prstGeom prst="rect">
-            <a:avLst/>
-          </a:prstGeom>
-          <a:noFill/>
-        </p:spPr>
-        <p:txBody>
-          <a:bodyPr wrap="square" anchor="t" lIns="0" rIns="0" tIns="0" bIns="0">
-            <a:spAutoFit/>
-          </a:bodyPr>
-          <a:lstStyle/>
-          <a:p>
-            <a:pPr algn="r">
-              <a:lnSpc>
-                <a:spcPct val="115000"/>
-              </a:lnSpc>
-            </a:pPr>
-            <a:r>
-              <a:rPr sz="950" b="0">
-                <a:solidFill>
-                  <a:srgbClr val="6E6E73"/>
-                </a:solidFill>
-                <a:latin typeface="맑은 고딕"/>
-                <a:ea typeface="맑은 고딕"/>
-                <a:cs typeface="맑은 고딕"/>
-              </a:rPr>
-              <a:t>04 / 05</a:t>
+                <a:latin typeface="Pretendard"/>
+              </a:rPr>
+              <a:t>04 / 07</a:t>
             </a:r>
           </a:p>
         </p:txBody>
@@ -5718,25 +5550,63 @@
       <p:grpSpPr/>
       <p:sp>
         <p:nvSpPr>
-          <p:cNvPr id="2" name="Rectangle 1"/>
+          <p:cNvPr id="2" name="TextBox 1"/>
+          <p:cNvSpPr txBox="1"/>
+          <p:nvPr/>
+        </p:nvSpPr>
+        <p:spPr>
+          <a:xfrm>
+            <a:off x="877824" y="658368"/>
+            <a:ext cx="10436047" cy="365760"/>
+          </a:xfrm>
+          <a:prstGeom prst="rect">
+            <a:avLst/>
+          </a:prstGeom>
+          <a:noFill/>
+        </p:spPr>
+        <p:txBody>
+          <a:bodyPr wrap="square" anchor="t" lIns="0" rIns="0" tIns="0" bIns="0">
+            <a:spAutoFit/>
+          </a:bodyPr>
+          <a:lstStyle/>
+          <a:p>
+            <a:pPr algn="l">
+              <a:lnSpc>
+                <a:spcPct val="110000"/>
+              </a:lnSpc>
+            </a:pPr>
+            <a:r>
+              <a:rPr sz="1100" b="1">
+                <a:solidFill>
+                  <a:srgbClr val="6E6E73"/>
+                </a:solidFill>
+                <a:latin typeface="Pretendard"/>
+              </a:rPr>
+              <a:t>04 · LEARN — 배움을 흘리지 않는다</a:t>
+            </a:r>
+          </a:p>
+        </p:txBody>
+      </p:sp>
+      <p:sp>
+        <p:nvSpPr>
+          <p:cNvPr id="3" name="Rectangle 2"/>
           <p:cNvSpPr/>
           <p:nvPr/>
         </p:nvSpPr>
         <p:spPr>
           <a:xfrm>
-            <a:off x="0" y="0"/>
-            <a:ext cx="12191695" cy="6858000"/>
+            <a:off x="877824" y="1024128"/>
+            <a:ext cx="566928" cy="38100"/>
           </a:xfrm>
           <a:prstGeom prst="rect">
             <a:avLst/>
           </a:prstGeom>
           <a:solidFill>
-            <a:srgbClr val="FFFFFF"/>
+            <a:srgbClr val="1D1D1F"/>
           </a:solidFill>
           <a:ln>
             <a:noFill/>
           </a:ln>
-          <a:effectLst/>
         </p:spPr>
         <p:style>
           <a:lnRef idx="1">
@@ -5762,14 +5632,14 @@
       </p:sp>
       <p:sp>
         <p:nvSpPr>
-          <p:cNvPr id="3" name="TextBox 2"/>
+          <p:cNvPr id="4" name="TextBox 3"/>
           <p:cNvSpPr txBox="1"/>
           <p:nvPr/>
         </p:nvSpPr>
         <p:spPr>
           <a:xfrm>
-            <a:off x="868680" y="658368"/>
-            <a:ext cx="10058400" cy="365760"/>
+            <a:off x="877824" y="1234440"/>
+            <a:ext cx="10436047" cy="822960"/>
           </a:xfrm>
           <a:prstGeom prst="rect">
             <a:avLst/>
@@ -5784,40 +5654,313 @@
           <a:p>
             <a:pPr algn="l">
               <a:lnSpc>
+                <a:spcPct val="110000"/>
+              </a:lnSpc>
+            </a:pPr>
+            <a:r>
+              <a:rPr sz="3400" b="1">
+                <a:solidFill>
+                  <a:srgbClr val="1D1D1F"/>
+                </a:solidFill>
+                <a:latin typeface="Pretendard"/>
+              </a:rPr>
+              <a:t>이기적스폰지 공유회, 5가지</a:t>
+            </a:r>
+          </a:p>
+        </p:txBody>
+      </p:sp>
+      <p:sp>
+        <p:nvSpPr>
+          <p:cNvPr id="5" name="TextBox 4"/>
+          <p:cNvSpPr txBox="1"/>
+          <p:nvPr/>
+        </p:nvSpPr>
+        <p:spPr>
+          <a:xfrm>
+            <a:off x="877824" y="2194560"/>
+            <a:ext cx="10436047" cy="3931920"/>
+          </a:xfrm>
+          <a:prstGeom prst="rect">
+            <a:avLst/>
+          </a:prstGeom>
+          <a:noFill/>
+        </p:spPr>
+        <p:txBody>
+          <a:bodyPr wrap="square" lIns="0" rIns="0" tIns="0" bIns="0">
+            <a:spAutoFit/>
+          </a:bodyPr>
+          <a:lstStyle/>
+          <a:p>
+            <a:pPr>
+              <a:lnSpc>
+                <a:spcPct val="122000"/>
+              </a:lnSpc>
+              <a:spcAft>
+                <a:spcPts val="1300"/>
+              </a:spcAft>
+            </a:pPr>
+            <a:r>
+              <a:rPr sz="1900" b="1">
+                <a:solidFill>
+                  <a:srgbClr val="1D1D1F"/>
+                </a:solidFill>
+                <a:latin typeface="Pretendard"/>
+              </a:rPr>
+              <a:t>①  </a:t>
+            </a:r>
+            <a:r>
+              <a:rPr sz="1900" b="1">
+                <a:solidFill>
+                  <a:srgbClr val="1D1D1F"/>
+                </a:solidFill>
+                <a:latin typeface="Pretendard"/>
+              </a:rPr>
+              <a:t>기본 스킬  </a:t>
+            </a:r>
+            <a:r>
+              <a:rPr sz="1600">
+                <a:solidFill>
+                  <a:srgbClr val="6E6E73"/>
+                </a:solidFill>
+                <a:latin typeface="Pretendard"/>
+              </a:rPr>
+              <a:t>반복하는 일을 skill.md로 굳혀 자동 발동.</a:t>
+            </a:r>
+          </a:p>
+          <a:p>
+            <a:pPr>
+              <a:lnSpc>
+                <a:spcPct val="122000"/>
+              </a:lnSpc>
+              <a:spcAft>
+                <a:spcPts val="1300"/>
+              </a:spcAft>
+            </a:pPr>
+            <a:r>
+              <a:rPr sz="1900" b="1">
+                <a:solidFill>
+                  <a:srgbClr val="1D1D1F"/>
+                </a:solidFill>
+                <a:latin typeface="Pretendard"/>
+              </a:rPr>
+              <a:t>②  </a:t>
+            </a:r>
+            <a:r>
+              <a:rPr sz="1900" b="1">
+                <a:solidFill>
+                  <a:srgbClr val="1D1D1F"/>
+                </a:solidFill>
+                <a:latin typeface="Pretendard"/>
+              </a:rPr>
+              <a:t>KEY 연결 → CRUD 게시판  </a:t>
+            </a:r>
+            <a:r>
+              <a:rPr sz="1600">
+                <a:solidFill>
+                  <a:srgbClr val="6E6E73"/>
+                </a:solidFill>
+                <a:latin typeface="Pretendard"/>
+              </a:rPr>
+              <a:t>.env 하나로 GitHub·Supabase·Vercel 배선.</a:t>
+            </a:r>
+          </a:p>
+          <a:p>
+            <a:pPr>
+              <a:lnSpc>
+                <a:spcPct val="122000"/>
+              </a:lnSpc>
+              <a:spcAft>
+                <a:spcPts val="1300"/>
+              </a:spcAft>
+            </a:pPr>
+            <a:r>
+              <a:rPr sz="1900" b="1">
+                <a:solidFill>
+                  <a:srgbClr val="1D1D1F"/>
+                </a:solidFill>
+                <a:latin typeface="Pretendard"/>
+              </a:rPr>
+              <a:t>③  </a:t>
+            </a:r>
+            <a:r>
+              <a:rPr sz="1900" b="1">
+                <a:solidFill>
+                  <a:srgbClr val="1D1D1F"/>
+                </a:solidFill>
+                <a:latin typeface="Pretendard"/>
+              </a:rPr>
+              <a:t>딥인터뷰  </a:t>
+            </a:r>
+            <a:r>
+              <a:rPr sz="1600">
+                <a:solidFill>
+                  <a:srgbClr val="6E6E73"/>
+                </a:solidFill>
+                <a:latin typeface="Pretendard"/>
+              </a:rPr>
+              <a:t>"뭘 만들까"가 아니라 "뭐가 불편한가"부터.</a:t>
+            </a:r>
+          </a:p>
+          <a:p>
+            <a:pPr>
+              <a:lnSpc>
+                <a:spcPct val="122000"/>
+              </a:lnSpc>
+              <a:spcAft>
+                <a:spcPts val="1300"/>
+              </a:spcAft>
+            </a:pPr>
+            <a:r>
+              <a:rPr sz="1900" b="1">
+                <a:solidFill>
+                  <a:srgbClr val="1D1D1F"/>
+                </a:solidFill>
+                <a:latin typeface="Pretendard"/>
+              </a:rPr>
+              <a:t>④  </a:t>
+            </a:r>
+            <a:r>
+              <a:rPr sz="1900" b="1">
+                <a:solidFill>
+                  <a:srgbClr val="1D1D1F"/>
+                </a:solidFill>
+                <a:latin typeface="Pretendard"/>
+              </a:rPr>
+              <a:t>씽킹노트  </a:t>
+            </a:r>
+            <a:r>
+              <a:rPr sz="1600">
+                <a:solidFill>
+                  <a:srgbClr val="6E6E73"/>
+                </a:solidFill>
+                <a:latin typeface="Pretendard"/>
+              </a:rPr>
+              <a:t>배운 걸 흘리지 말고 노트로 붙잡아 쌓기.</a:t>
+            </a:r>
+          </a:p>
+          <a:p>
+            <a:pPr>
+              <a:lnSpc>
+                <a:spcPct val="122000"/>
+              </a:lnSpc>
+              <a:spcAft>
+                <a:spcPts val="1300"/>
+              </a:spcAft>
+            </a:pPr>
+            <a:r>
+              <a:rPr sz="1900" b="1">
+                <a:solidFill>
+                  <a:srgbClr val="1D1D1F"/>
+                </a:solidFill>
+                <a:latin typeface="Pretendard"/>
+              </a:rPr>
+              <a:t>⑤  </a:t>
+            </a:r>
+            <a:r>
+              <a:rPr sz="1900" b="1">
+                <a:solidFill>
+                  <a:srgbClr val="1D1D1F"/>
+                </a:solidFill>
+                <a:latin typeface="Pretendard"/>
+              </a:rPr>
+              <a:t>서브에이전트·동적 워크플로우  </a:t>
+            </a:r>
+            <a:r>
+              <a:rPr sz="1600">
+                <a:solidFill>
+                  <a:srgbClr val="6E6E73"/>
+                </a:solidFill>
+                <a:latin typeface="Pretendard"/>
+              </a:rPr>
+              <a:t>큰 일은 쪼개서 병렬로.</a:t>
+            </a:r>
+          </a:p>
+        </p:txBody>
+      </p:sp>
+      <p:sp>
+        <p:nvSpPr>
+          <p:cNvPr id="6" name="Rectangle 5"/>
+          <p:cNvSpPr/>
+          <p:nvPr/>
+        </p:nvSpPr>
+        <p:spPr>
+          <a:xfrm>
+            <a:off x="877824" y="5257800"/>
+            <a:ext cx="10436047" cy="658368"/>
+          </a:xfrm>
+          <a:prstGeom prst="rect">
+            <a:avLst/>
+          </a:prstGeom>
+          <a:solidFill>
+            <a:srgbClr val="F6F6F8"/>
+          </a:solidFill>
+          <a:ln w="9525">
+            <a:solidFill>
+              <a:srgbClr val="D2D2D7"/>
+            </a:solidFill>
+          </a:ln>
+        </p:spPr>
+        <p:style>
+          <a:lnRef idx="1">
+            <a:schemeClr val="accent1"/>
+          </a:lnRef>
+          <a:fillRef idx="3">
+            <a:schemeClr val="accent1"/>
+          </a:fillRef>
+          <a:effectRef idx="2">
+            <a:schemeClr val="accent1"/>
+          </a:effectRef>
+          <a:fontRef idx="minor">
+            <a:schemeClr val="lt1"/>
+          </a:fontRef>
+        </p:style>
+        <p:txBody>
+          <a:bodyPr rtlCol="0" anchor="ctr" wrap="square" lIns="164592" rIns="164592"/>
+          <a:lstStyle/>
+          <a:p>
+            <a:pPr algn="ctr">
+              <a:lnSpc>
                 <a:spcPct val="115000"/>
               </a:lnSpc>
             </a:pPr>
             <a:r>
-              <a:rPr sz="1200" b="1">
-                <a:solidFill>
-                  <a:srgbClr val="6E6E73"/>
-                </a:solidFill>
-                <a:latin typeface="맑은 고딕"/>
-                <a:ea typeface="맑은 고딕"/>
-                <a:cs typeface="맑은 고딕"/>
-              </a:rPr>
-              <a:t>04 · LIVE &amp; NEXT — 결과와 다음</a:t>
+              <a:rPr sz="1500" b="1">
+                <a:solidFill>
+                  <a:srgbClr val="1D1D1F"/>
+                </a:solidFill>
+                <a:latin typeface="Pretendard"/>
+              </a:rPr>
+              <a:t>💡 한 문장: </a:t>
+            </a:r>
+            <a:r>
+              <a:rPr sz="1500">
+                <a:solidFill>
+                  <a:srgbClr val="424245"/>
+                </a:solidFill>
+                <a:latin typeface="Pretendard"/>
+              </a:rPr>
+              <a:t>재활용이 자동화의 핵심 = 스킬. 스킬과 서브에이전트는 본질적으로 한 몸이다.</a:t>
             </a:r>
           </a:p>
         </p:txBody>
       </p:sp>
       <p:cxnSp>
         <p:nvCxnSpPr>
-          <p:cNvPr id="4" name="Connector 3"/>
+          <p:cNvPr id="7" name="Connector 6"/>
           <p:cNvCxnSpPr/>
           <p:nvPr/>
         </p:nvCxnSpPr>
         <p:spPr>
           <a:xfrm>
-            <a:off x="868680" y="1024128"/>
-            <a:ext cx="566928" cy="0"/>
+            <a:off x="877824" y="6263640"/>
+            <a:ext cx="10436047" cy="0"/>
           </a:xfrm>
           <a:prstGeom prst="bentConnector3">
             <a:avLst/>
           </a:prstGeom>
-          <a:ln w="27940">
+          <a:ln w="9525">
             <a:solidFill>
-              <a:srgbClr val="1D1D1F"/>
+              <a:srgbClr val="D2D2D7"/>
             </a:solidFill>
           </a:ln>
         </p:spPr>
@@ -5838,14 +5981,14 @@
       </p:cxnSp>
       <p:sp>
         <p:nvSpPr>
-          <p:cNvPr id="5" name="TextBox 4"/>
+          <p:cNvPr id="8" name="TextBox 7"/>
           <p:cNvSpPr txBox="1"/>
           <p:nvPr/>
         </p:nvSpPr>
         <p:spPr>
           <a:xfrm>
-            <a:off x="868680" y="1417320"/>
-            <a:ext cx="10424160" cy="914400"/>
+            <a:off x="877824" y="6355080"/>
+            <a:ext cx="10436047" cy="320040"/>
           </a:xfrm>
           <a:prstGeom prst="rect">
             <a:avLst/>
@@ -5860,33 +6003,40 @@
           <a:p>
             <a:pPr algn="l">
               <a:lnSpc>
-                <a:spcPct val="115000"/>
+                <a:spcPct val="110000"/>
               </a:lnSpc>
             </a:pPr>
             <a:r>
-              <a:rPr sz="3600" b="1">
-                <a:solidFill>
-                  <a:srgbClr val="1D1D1F"/>
-                </a:solidFill>
-                <a:latin typeface="맑은 고딕"/>
-                <a:ea typeface="맑은 고딕"/>
-                <a:cs typeface="맑은 고딕"/>
-              </a:rPr>
-              <a:t>이미 라이브, 다음은 진짜 서버</a:t>
-            </a:r>
-          </a:p>
-        </p:txBody>
-      </p:sp>
-      <p:sp>
-        <p:nvSpPr>
-          <p:cNvPr id="6" name="TextBox 5"/>
+              <a:rPr sz="900" b="1">
+                <a:solidFill>
+                  <a:srgbClr val="6E6E73"/>
+                </a:solidFill>
+                <a:latin typeface="Pretendard"/>
+              </a:rPr>
+              <a:t>Aramirror</a:t>
+            </a:r>
+            <a:r>
+              <a:rPr sz="900" b="0">
+                <a:solidFill>
+                  <a:srgbClr val="6E6E73"/>
+                </a:solidFill>
+                <a:latin typeface="Pretendard"/>
+              </a:rPr>
+              <a:t>  — AI는 거울이 된다</a:t>
+            </a:r>
+          </a:p>
+        </p:txBody>
+      </p:sp>
+      <p:sp>
+        <p:nvSpPr>
+          <p:cNvPr id="9" name="TextBox 8"/>
           <p:cNvSpPr txBox="1"/>
           <p:nvPr/>
         </p:nvSpPr>
         <p:spPr>
           <a:xfrm>
-            <a:off x="868680" y="2468880"/>
-            <a:ext cx="10454335" cy="3291840"/>
+            <a:off x="877824" y="6355080"/>
+            <a:ext cx="10436047" cy="320040"/>
           </a:xfrm>
           <a:prstGeom prst="rect">
             <a:avLst/>
@@ -5894,6 +6044,184 @@
           <a:noFill/>
         </p:spPr>
         <p:txBody>
+          <a:bodyPr wrap="square" anchor="t" lIns="0" rIns="0" tIns="0" bIns="0">
+            <a:spAutoFit/>
+          </a:bodyPr>
+          <a:lstStyle/>
+          <a:p>
+            <a:pPr algn="r">
+              <a:lnSpc>
+                <a:spcPct val="110000"/>
+              </a:lnSpc>
+            </a:pPr>
+            <a:r>
+              <a:rPr sz="900" b="0">
+                <a:solidFill>
+                  <a:srgbClr val="6E6E73"/>
+                </a:solidFill>
+                <a:latin typeface="Pretendard"/>
+              </a:rPr>
+              <a:t>05 / 07</a:t>
+            </a:r>
+          </a:p>
+        </p:txBody>
+      </p:sp>
+    </p:spTree>
+  </p:cSld>
+  <p:clrMapOvr>
+    <a:masterClrMapping/>
+  </p:clrMapOvr>
+</p:sld>
+</file>
+
+<file path=ppt/slides/slide6.xml><?xml version="1.0" encoding="utf-8"?>
+<p:sld xmlns:a="http://schemas.openxmlformats.org/drawingml/2006/main" xmlns:p="http://schemas.openxmlformats.org/presentationml/2006/main" xmlns:r="http://schemas.openxmlformats.org/officeDocument/2006/relationships">
+  <p:cSld>
+    <p:spTree>
+      <p:nvGrpSpPr>
+        <p:cNvPr id="1" name=""/>
+        <p:cNvGrpSpPr/>
+        <p:nvPr/>
+      </p:nvGrpSpPr>
+      <p:grpSpPr/>
+      <p:sp>
+        <p:nvSpPr>
+          <p:cNvPr id="2" name="TextBox 1"/>
+          <p:cNvSpPr txBox="1"/>
+          <p:nvPr/>
+        </p:nvSpPr>
+        <p:spPr>
+          <a:xfrm>
+            <a:off x="877824" y="658368"/>
+            <a:ext cx="10436047" cy="365760"/>
+          </a:xfrm>
+          <a:prstGeom prst="rect">
+            <a:avLst/>
+          </a:prstGeom>
+          <a:noFill/>
+        </p:spPr>
+        <p:txBody>
+          <a:bodyPr wrap="square" anchor="t" lIns="0" rIns="0" tIns="0" bIns="0">
+            <a:spAutoFit/>
+          </a:bodyPr>
+          <a:lstStyle/>
+          <a:p>
+            <a:pPr algn="l">
+              <a:lnSpc>
+                <a:spcPct val="110000"/>
+              </a:lnSpc>
+            </a:pPr>
+            <a:r>
+              <a:rPr sz="1100" b="1">
+                <a:solidFill>
+                  <a:srgbClr val="6E6E73"/>
+                </a:solidFill>
+                <a:latin typeface="Pretendard"/>
+              </a:rPr>
+              <a:t>05 · APPLY — 배운 걸 그날 내 것에</a:t>
+            </a:r>
+          </a:p>
+        </p:txBody>
+      </p:sp>
+      <p:sp>
+        <p:nvSpPr>
+          <p:cNvPr id="3" name="Rectangle 2"/>
+          <p:cNvSpPr/>
+          <p:nvPr/>
+        </p:nvSpPr>
+        <p:spPr>
+          <a:xfrm>
+            <a:off x="877824" y="1024128"/>
+            <a:ext cx="566928" cy="38100"/>
+          </a:xfrm>
+          <a:prstGeom prst="rect">
+            <a:avLst/>
+          </a:prstGeom>
+          <a:solidFill>
+            <a:srgbClr val="1D1D1F"/>
+          </a:solidFill>
+          <a:ln>
+            <a:noFill/>
+          </a:ln>
+        </p:spPr>
+        <p:style>
+          <a:lnRef idx="1">
+            <a:schemeClr val="accent1"/>
+          </a:lnRef>
+          <a:fillRef idx="3">
+            <a:schemeClr val="accent1"/>
+          </a:fillRef>
+          <a:effectRef idx="2">
+            <a:schemeClr val="accent1"/>
+          </a:effectRef>
+          <a:fontRef idx="minor">
+            <a:schemeClr val="lt1"/>
+          </a:fontRef>
+        </p:style>
+        <p:txBody>
+          <a:bodyPr rtlCol="0" anchor="ctr"/>
+          <a:lstStyle/>
+          <a:p>
+            <a:pPr algn="ctr"/>
+          </a:p>
+        </p:txBody>
+      </p:sp>
+      <p:sp>
+        <p:nvSpPr>
+          <p:cNvPr id="4" name="TextBox 3"/>
+          <p:cNvSpPr txBox="1"/>
+          <p:nvPr/>
+        </p:nvSpPr>
+        <p:spPr>
+          <a:xfrm>
+            <a:off x="877824" y="1234440"/>
+            <a:ext cx="10436047" cy="822960"/>
+          </a:xfrm>
+          <a:prstGeom prst="rect">
+            <a:avLst/>
+          </a:prstGeom>
+          <a:noFill/>
+        </p:spPr>
+        <p:txBody>
+          <a:bodyPr wrap="square" anchor="t" lIns="0" rIns="0" tIns="0" bIns="0">
+            <a:spAutoFit/>
+          </a:bodyPr>
+          <a:lstStyle/>
+          <a:p>
+            <a:pPr algn="l">
+              <a:lnSpc>
+                <a:spcPct val="110000"/>
+              </a:lnSpc>
+            </a:pPr>
+            <a:r>
+              <a:rPr sz="3400" b="1">
+                <a:solidFill>
+                  <a:srgbClr val="1D1D1F"/>
+                </a:solidFill>
+                <a:latin typeface="Pretendard"/>
+              </a:rPr>
+              <a:t>듣고 끝이 아니라, 그날 만들었다</a:t>
+            </a:r>
+          </a:p>
+        </p:txBody>
+      </p:sp>
+      <p:sp>
+        <p:nvSpPr>
+          <p:cNvPr id="5" name="TextBox 4"/>
+          <p:cNvSpPr txBox="1"/>
+          <p:nvPr/>
+        </p:nvSpPr>
+        <p:spPr>
+          <a:xfrm>
+            <a:off x="877824" y="2286000"/>
+            <a:ext cx="10436047" cy="3931920"/>
+          </a:xfrm>
+          <a:prstGeom prst="rect">
+            <a:avLst/>
+          </a:prstGeom>
+          <a:noFill/>
+        </p:spPr>
+        <p:txBody>
           <a:bodyPr wrap="square" lIns="0" rIns="0" tIns="0" bIns="0">
             <a:spAutoFit/>
           </a:bodyPr>
@@ -5901,144 +6229,163 @@
           <a:p>
             <a:pPr>
               <a:lnSpc>
-                <a:spcPct val="112000"/>
+                <a:spcPct val="122000"/>
               </a:lnSpc>
               <a:spcAft>
-                <a:spcPts val="1400"/>
+                <a:spcPts val="1300"/>
               </a:spcAft>
             </a:pPr>
             <a:r>
-              <a:rPr sz="1700" b="1">
+              <a:rPr sz="1900" b="1">
                 <a:solidFill>
                   <a:srgbClr val="1D1D1F"/>
                 </a:solidFill>
-                <a:latin typeface="맑은 고딕"/>
-                <a:ea typeface="맑은 고딕"/>
-                <a:cs typeface="맑은 고딕"/>
-              </a:rPr>
-              <a:t>—  </a:t>
-            </a:r>
-            <a:r>
-              <a:rPr sz="1700" b="1">
+                <a:latin typeface="Pretendard"/>
+              </a:rPr>
+              <a:t>②  </a:t>
+            </a:r>
+            <a:r>
+              <a:rPr sz="1900" b="1">
                 <a:solidFill>
                   <a:srgbClr val="1D1D1F"/>
                 </a:solidFill>
-                <a:latin typeface="맑은 고딕"/>
-                <a:ea typeface="맑은 고딕"/>
-                <a:cs typeface="맑은 고딕"/>
-              </a:rPr>
-              <a:t>라이브 배포 완료.</a:t>
-            </a:r>
-            <a:r>
-              <a:rPr sz="1500" b="0">
+                <a:latin typeface="Pretendard"/>
+              </a:rPr>
+              <a:t>KEY→CRUD 그대로.  </a:t>
+            </a:r>
+            <a:r>
+              <a:rPr sz="1600">
                 <a:solidFill>
                   <a:srgbClr val="6E6E73"/>
                 </a:solidFill>
-                <a:latin typeface="맑은 고딕"/>
-                <a:ea typeface="맑은 고딕"/>
-                <a:cs typeface="맑은 고딕"/>
-              </a:rPr>
-              <a:t>   hyun-arch.github.io/board · /admin</a:t>
+                <a:latin typeface="Pretendard"/>
+              </a:rPr>
+              <a:t>게시판 /board · 관리자 /admin 을 그날 구축. 정적 사이트 위 localStorage로 실제 동작, KEY만 꽂으면 실서버로 승격.</a:t>
             </a:r>
           </a:p>
           <a:p>
             <a:pPr>
               <a:lnSpc>
-                <a:spcPct val="112000"/>
+                <a:spcPct val="122000"/>
               </a:lnSpc>
               <a:spcAft>
-                <a:spcPts val="1400"/>
+                <a:spcPts val="1300"/>
               </a:spcAft>
             </a:pPr>
             <a:r>
-              <a:rPr sz="1700" b="1">
+              <a:rPr sz="1900" b="1">
                 <a:solidFill>
                   <a:srgbClr val="1D1D1F"/>
                 </a:solidFill>
-                <a:latin typeface="맑은 고딕"/>
-                <a:ea typeface="맑은 고딕"/>
-                <a:cs typeface="맑은 고딕"/>
-              </a:rPr>
-              <a:t>—  </a:t>
-            </a:r>
-            <a:r>
-              <a:rPr sz="1700" b="1">
+                <a:latin typeface="Pretendard"/>
+              </a:rPr>
+              <a:t>⑤  </a:t>
+            </a:r>
+            <a:r>
+              <a:rPr sz="1900" b="1">
                 <a:solidFill>
                   <a:srgbClr val="1D1D1F"/>
                 </a:solidFill>
-                <a:latin typeface="맑은 고딕"/>
-                <a:ea typeface="맑은 고딕"/>
-                <a:cs typeface="맑은 고딕"/>
-              </a:rPr>
-              <a:t>버그 2건 수정까지 반영.</a:t>
-            </a:r>
-            <a:r>
-              <a:rPr sz="1500" b="0">
+                <a:latin typeface="Pretendard"/>
+              </a:rPr>
+              <a:t>서브에이전트 그대로.  </a:t>
+            </a:r>
+            <a:r>
+              <a:rPr sz="1600">
                 <a:solidFill>
                   <a:srgbClr val="6E6E73"/>
                 </a:solidFill>
-                <a:latin typeface="맑은 고딕"/>
-                <a:ea typeface="맑은 고딕"/>
-                <a:cs typeface="맑은 고딕"/>
-              </a:rPr>
-              <a:t>   커밋·배포·재검증 완료.</a:t>
+                <a:latin typeface="Pretendard"/>
+              </a:rPr>
+              <a:t>공유회 스크린샷 32장을 병렬 MECE로 정리 — 배운 방법을 문서화하는 그 자리에서 써먹었다.</a:t>
             </a:r>
           </a:p>
           <a:p>
             <a:pPr>
               <a:lnSpc>
-                <a:spcPct val="112000"/>
+                <a:spcPct val="122000"/>
               </a:lnSpc>
               <a:spcAft>
-                <a:spcPts val="1400"/>
+                <a:spcPts val="1300"/>
               </a:spcAft>
             </a:pPr>
             <a:r>
-              <a:rPr sz="1700" b="1">
+              <a:rPr sz="1900" b="1">
                 <a:solidFill>
                   <a:srgbClr val="1D1D1F"/>
                 </a:solidFill>
-                <a:latin typeface="맑은 고딕"/>
-                <a:ea typeface="맑은 고딕"/>
-                <a:cs typeface="맑은 고딕"/>
+                <a:latin typeface="Pretendard"/>
               </a:rPr>
               <a:t>—  </a:t>
             </a:r>
             <a:r>
-              <a:rPr sz="1700" b="1">
+              <a:rPr sz="1900" b="1">
                 <a:solidFill>
                   <a:srgbClr val="1D1D1F"/>
                 </a:solidFill>
-                <a:latin typeface="맑은 고딕"/>
-                <a:ea typeface="맑은 고딕"/>
-                <a:cs typeface="맑은 고딕"/>
-              </a:rPr>
-              <a:t>다음 — 진짜 서버 CRUD.</a:t>
-            </a:r>
-            <a:r>
-              <a:rPr sz="1500" b="0">
+                <a:latin typeface="Pretendard"/>
+              </a:rPr>
+              <a:t>자가검수로 실버그 2건.  </a:t>
+            </a:r>
+            <a:r>
+              <a:rPr sz="1600">
                 <a:solidFill>
                   <a:srgbClr val="6E6E73"/>
                 </a:solidFill>
-                <a:latin typeface="맑은 고딕"/>
-                <a:ea typeface="맑은 고딕"/>
-                <a:cs typeface="맑은 고딕"/>
-              </a:rPr>
-              <a:t>   Supabase/Vercel 연결, 키만 꽂으면 다중 기기 공유.</a:t>
+                <a:latin typeface="Pretendard"/>
+              </a:rPr>
+              <a:t>빈 모달 노출 · 관리자 재방문 TDZ 에러를 스크린샷 검수로 잡아 고쳤다.</a:t>
+            </a:r>
+          </a:p>
+          <a:p>
+            <a:pPr>
+              <a:lnSpc>
+                <a:spcPct val="122000"/>
+              </a:lnSpc>
+              <a:spcAft>
+                <a:spcPts val="1300"/>
+              </a:spcAft>
+            </a:pPr>
+            <a:r>
+              <a:rPr sz="1900" b="1">
+                <a:solidFill>
+                  <a:srgbClr val="1D1D1F"/>
+                </a:solidFill>
+                <a:latin typeface="Pretendard"/>
+              </a:rPr>
+              <a:t>—  </a:t>
+            </a:r>
+            <a:r>
+              <a:rPr sz="1900" b="1">
+                <a:solidFill>
+                  <a:srgbClr val="1D1D1F"/>
+                </a:solidFill>
+                <a:latin typeface="Pretendard"/>
+              </a:rPr>
+              <a:t>라이브.  </a:t>
+            </a:r>
+            <a:r>
+              <a:rPr sz="1600">
+                <a:solidFill>
+                  <a:srgbClr val="6E6E73"/>
+                </a:solidFill>
+                <a:latin typeface="Pretendard"/>
+              </a:rPr>
+              <a:t>hyun-arch.github.io/board · /admin — 이미 돌아간다.</a:t>
             </a:r>
           </a:p>
         </p:txBody>
       </p:sp>
       <p:cxnSp>
         <p:nvCxnSpPr>
-          <p:cNvPr id="7" name="Connector 6"/>
+          <p:cNvPr id="6" name="Connector 5"/>
           <p:cNvCxnSpPr/>
           <p:nvPr/>
         </p:nvCxnSpPr>
         <p:spPr>
           <a:xfrm>
-            <a:off x="868680" y="4892040"/>
-            <a:ext cx="10454335" cy="0"/>
+            <a:off x="877824" y="6263640"/>
+            <a:ext cx="10436047" cy="0"/>
           </a:xfrm>
           <a:prstGeom prst="bentConnector3">
             <a:avLst/>
@@ -6066,14 +6413,14 @@
       </p:cxnSp>
       <p:sp>
         <p:nvSpPr>
-          <p:cNvPr id="8" name="TextBox 7"/>
+          <p:cNvPr id="7" name="TextBox 6"/>
           <p:cNvSpPr txBox="1"/>
           <p:nvPr/>
         </p:nvSpPr>
         <p:spPr>
           <a:xfrm>
-            <a:off x="868680" y="5074920"/>
-            <a:ext cx="10424160" cy="822960"/>
+            <a:off x="877824" y="6355080"/>
+            <a:ext cx="10436047" cy="320040"/>
           </a:xfrm>
           <a:prstGeom prst="rect">
             <a:avLst/>
@@ -6088,55 +6435,315 @@
           <a:p>
             <a:pPr algn="l">
               <a:lnSpc>
-                <a:spcPct val="115000"/>
+                <a:spcPct val="110000"/>
               </a:lnSpc>
             </a:pPr>
             <a:r>
-              <a:rPr sz="2400" b="1">
+              <a:rPr sz="900" b="1">
+                <a:solidFill>
+                  <a:srgbClr val="6E6E73"/>
+                </a:solidFill>
+                <a:latin typeface="Pretendard"/>
+              </a:rPr>
+              <a:t>Aramirror</a:t>
+            </a:r>
+            <a:r>
+              <a:rPr sz="900" b="0">
+                <a:solidFill>
+                  <a:srgbClr val="6E6E73"/>
+                </a:solidFill>
+                <a:latin typeface="Pretendard"/>
+              </a:rPr>
+              <a:t>  — AI는 거울이 된다</a:t>
+            </a:r>
+          </a:p>
+        </p:txBody>
+      </p:sp>
+      <p:sp>
+        <p:nvSpPr>
+          <p:cNvPr id="8" name="TextBox 7"/>
+          <p:cNvSpPr txBox="1"/>
+          <p:nvPr/>
+        </p:nvSpPr>
+        <p:spPr>
+          <a:xfrm>
+            <a:off x="877824" y="6355080"/>
+            <a:ext cx="10436047" cy="320040"/>
+          </a:xfrm>
+          <a:prstGeom prst="rect">
+            <a:avLst/>
+          </a:prstGeom>
+          <a:noFill/>
+        </p:spPr>
+        <p:txBody>
+          <a:bodyPr wrap="square" anchor="t" lIns="0" rIns="0" tIns="0" bIns="0">
+            <a:spAutoFit/>
+          </a:bodyPr>
+          <a:lstStyle/>
+          <a:p>
+            <a:pPr algn="r">
+              <a:lnSpc>
+                <a:spcPct val="110000"/>
+              </a:lnSpc>
+            </a:pPr>
+            <a:r>
+              <a:rPr sz="900" b="0">
+                <a:solidFill>
+                  <a:srgbClr val="6E6E73"/>
+                </a:solidFill>
+                <a:latin typeface="Pretendard"/>
+              </a:rPr>
+              <a:t>06 / 07</a:t>
+            </a:r>
+          </a:p>
+        </p:txBody>
+      </p:sp>
+    </p:spTree>
+  </p:cSld>
+  <p:clrMapOvr>
+    <a:masterClrMapping/>
+  </p:clrMapOvr>
+</p:sld>
+</file>
+
+<file path=ppt/slides/slide7.xml><?xml version="1.0" encoding="utf-8"?>
+<p:sld xmlns:a="http://schemas.openxmlformats.org/drawingml/2006/main" xmlns:p="http://schemas.openxmlformats.org/presentationml/2006/main" xmlns:r="http://schemas.openxmlformats.org/officeDocument/2006/relationships">
+  <p:cSld>
+    <p:spTree>
+      <p:nvGrpSpPr>
+        <p:cNvPr id="1" name=""/>
+        <p:cNvGrpSpPr/>
+        <p:nvPr/>
+      </p:nvGrpSpPr>
+      <p:grpSpPr/>
+      <p:sp>
+        <p:nvSpPr>
+          <p:cNvPr id="2" name="TextBox 1"/>
+          <p:cNvSpPr txBox="1"/>
+          <p:nvPr/>
+        </p:nvSpPr>
+        <p:spPr>
+          <a:xfrm>
+            <a:off x="877824" y="658368"/>
+            <a:ext cx="10436047" cy="365760"/>
+          </a:xfrm>
+          <a:prstGeom prst="rect">
+            <a:avLst/>
+          </a:prstGeom>
+          <a:noFill/>
+        </p:spPr>
+        <p:txBody>
+          <a:bodyPr wrap="square" anchor="t" lIns="0" rIns="0" tIns="0" bIns="0">
+            <a:spAutoFit/>
+          </a:bodyPr>
+          <a:lstStyle/>
+          <a:p>
+            <a:pPr algn="l">
+              <a:lnSpc>
+                <a:spcPct val="110000"/>
+              </a:lnSpc>
+            </a:pPr>
+            <a:r>
+              <a:rPr sz="1100" b="1">
+                <a:solidFill>
+                  <a:srgbClr val="6E6E73"/>
+                </a:solidFill>
+                <a:latin typeface="Pretendard"/>
+              </a:rPr>
+              <a:t>06 · NOW — 지금, 그리고 배운 것</a:t>
+            </a:r>
+          </a:p>
+        </p:txBody>
+      </p:sp>
+      <p:sp>
+        <p:nvSpPr>
+          <p:cNvPr id="3" name="Rectangle 2"/>
+          <p:cNvSpPr/>
+          <p:nvPr/>
+        </p:nvSpPr>
+        <p:spPr>
+          <a:xfrm>
+            <a:off x="877824" y="1024128"/>
+            <a:ext cx="566928" cy="38100"/>
+          </a:xfrm>
+          <a:prstGeom prst="rect">
+            <a:avLst/>
+          </a:prstGeom>
+          <a:solidFill>
+            <a:srgbClr val="1D1D1F"/>
+          </a:solidFill>
+          <a:ln>
+            <a:noFill/>
+          </a:ln>
+        </p:spPr>
+        <p:style>
+          <a:lnRef idx="1">
+            <a:schemeClr val="accent1"/>
+          </a:lnRef>
+          <a:fillRef idx="3">
+            <a:schemeClr val="accent1"/>
+          </a:fillRef>
+          <a:effectRef idx="2">
+            <a:schemeClr val="accent1"/>
+          </a:effectRef>
+          <a:fontRef idx="minor">
+            <a:schemeClr val="lt1"/>
+          </a:fontRef>
+        </p:style>
+        <p:txBody>
+          <a:bodyPr rtlCol="0" anchor="ctr"/>
+          <a:lstStyle/>
+          <a:p>
+            <a:pPr algn="ctr"/>
+          </a:p>
+        </p:txBody>
+      </p:sp>
+      <p:sp>
+        <p:nvSpPr>
+          <p:cNvPr id="4" name="TextBox 3"/>
+          <p:cNvSpPr txBox="1"/>
+          <p:nvPr/>
+        </p:nvSpPr>
+        <p:spPr>
+          <a:xfrm>
+            <a:off x="877824" y="1234440"/>
+            <a:ext cx="10436047" cy="822960"/>
+          </a:xfrm>
+          <a:prstGeom prst="rect">
+            <a:avLst/>
+          </a:prstGeom>
+          <a:noFill/>
+        </p:spPr>
+        <p:txBody>
+          <a:bodyPr wrap="square" anchor="t" lIns="0" rIns="0" tIns="0" bIns="0">
+            <a:spAutoFit/>
+          </a:bodyPr>
+          <a:lstStyle/>
+          <a:p>
+            <a:pPr algn="l">
+              <a:lnSpc>
+                <a:spcPct val="110000"/>
+              </a:lnSpc>
+            </a:pPr>
+            <a:r>
+              <a:rPr sz="3400" b="1">
                 <a:solidFill>
                   <a:srgbClr val="1D1D1F"/>
                 </a:solidFill>
-                <a:latin typeface="맑은 고딕"/>
-                <a:ea typeface="맑은 고딕"/>
-                <a:cs typeface="맑은 고딕"/>
-              </a:rPr>
-              <a:t>“기록이 아니라 </a:t>
-            </a:r>
-            <a:r>
-              <a:rPr sz="2400" b="1">
+                <a:latin typeface="Pretendard"/>
+              </a:rPr>
+              <a:t>이미 살아 움직인다</a:t>
+            </a:r>
+          </a:p>
+        </p:txBody>
+      </p:sp>
+      <p:sp>
+        <p:nvSpPr>
+          <p:cNvPr id="5" name="TextBox 4"/>
+          <p:cNvSpPr txBox="1"/>
+          <p:nvPr/>
+        </p:nvSpPr>
+        <p:spPr>
+          <a:xfrm>
+            <a:off x="877824" y="2286000"/>
+            <a:ext cx="10436047" cy="3931920"/>
+          </a:xfrm>
+          <a:prstGeom prst="rect">
+            <a:avLst/>
+          </a:prstGeom>
+          <a:noFill/>
+        </p:spPr>
+        <p:txBody>
+          <a:bodyPr wrap="square" lIns="0" rIns="0" tIns="0" bIns="0">
+            <a:spAutoFit/>
+          </a:bodyPr>
+          <a:lstStyle/>
+          <a:p>
+            <a:pPr>
+              <a:lnSpc>
+                <a:spcPct val="124000"/>
+              </a:lnSpc>
+              <a:spcAft>
+                <a:spcPts val="1400"/>
+              </a:spcAft>
+            </a:pPr>
+            <a:r>
+              <a:rPr sz="1900" b="1">
                 <a:solidFill>
                   <a:srgbClr val="1D1D1F"/>
                 </a:solidFill>
-                <a:latin typeface="맑은 고딕"/>
-                <a:ea typeface="맑은 고딕"/>
-                <a:cs typeface="맑은 고딕"/>
-              </a:rPr>
-              <a:t>‘승격’</a:t>
-            </a:r>
-            <a:r>
-              <a:rPr sz="2400" b="1">
+                <a:latin typeface="Pretendard"/>
+              </a:rPr>
+              <a:t>—  </a:t>
+            </a:r>
+            <a:r>
+              <a:rPr sz="1900" b="1">
                 <a:solidFill>
                   <a:srgbClr val="1D1D1F"/>
                 </a:solidFill>
-                <a:latin typeface="맑은 고딕"/>
-                <a:ea typeface="맑은 고딕"/>
-                <a:cs typeface="맑은 고딕"/>
-              </a:rPr>
-              <a:t>이 핵심이다.”</a:t>
+                <a:latin typeface="Pretendard"/>
+              </a:rPr>
+              <a:t>라이브 배포 완료.  </a:t>
+            </a:r>
+            <a:r>
+              <a:rPr sz="1600">
+                <a:solidFill>
+                  <a:srgbClr val="6E6E73"/>
+                </a:solidFill>
+                <a:latin typeface="Pretendard"/>
+              </a:rPr>
+              <a:t>hyun-arch.github.io — The Wall · 몰입(Flow) · 게시판까지.</a:t>
+            </a:r>
+          </a:p>
+          <a:p>
+            <a:pPr>
+              <a:lnSpc>
+                <a:spcPct val="124000"/>
+              </a:lnSpc>
+              <a:spcAft>
+                <a:spcPts val="1400"/>
+              </a:spcAft>
+            </a:pPr>
+            <a:r>
+              <a:rPr sz="1900" b="1">
+                <a:solidFill>
+                  <a:srgbClr val="1D1D1F"/>
+                </a:solidFill>
+                <a:latin typeface="Pretendard"/>
+              </a:rPr>
+              <a:t>—  </a:t>
+            </a:r>
+            <a:r>
+              <a:rPr sz="1900" b="1">
+                <a:solidFill>
+                  <a:srgbClr val="1D1D1F"/>
+                </a:solidFill>
+                <a:latin typeface="Pretendard"/>
+              </a:rPr>
+              <a:t>매일 아침 7시.  </a:t>
+            </a:r>
+            <a:r>
+              <a:rPr sz="1600">
+                <a:solidFill>
+                  <a:srgbClr val="6E6E73"/>
+                </a:solidFill>
+                <a:latin typeface="Pretendard"/>
+              </a:rPr>
+              <a:t>밤새 종합한 걸 텔레그램으로 받는다 → 피드백 → 다듬기. OS가 돈다.</a:t>
             </a:r>
           </a:p>
         </p:txBody>
       </p:sp>
       <p:cxnSp>
         <p:nvCxnSpPr>
-          <p:cNvPr id="9" name="Connector 8"/>
+          <p:cNvPr id="6" name="Connector 5"/>
           <p:cNvCxnSpPr/>
           <p:nvPr/>
         </p:nvCxnSpPr>
         <p:spPr>
           <a:xfrm>
-            <a:off x="868680" y="6144768"/>
-            <a:ext cx="10454335" cy="0"/>
+            <a:off x="877824" y="4297680"/>
+            <a:ext cx="10436047" cy="0"/>
           </a:xfrm>
           <a:prstGeom prst="bentConnector3">
             <a:avLst/>
@@ -6164,14 +6771,14 @@
       </p:cxnSp>
       <p:sp>
         <p:nvSpPr>
-          <p:cNvPr id="10" name="TextBox 9"/>
+          <p:cNvPr id="7" name="TextBox 6"/>
           <p:cNvSpPr txBox="1"/>
           <p:nvPr/>
         </p:nvSpPr>
         <p:spPr>
           <a:xfrm>
-            <a:off x="868680" y="6236208"/>
-            <a:ext cx="7315200" cy="365760"/>
+            <a:off x="877824" y="4480560"/>
+            <a:ext cx="10436047" cy="640080"/>
           </a:xfrm>
           <a:prstGeom prst="rect">
             <a:avLst/>
@@ -6186,44 +6793,31 @@
           <a:p>
             <a:pPr algn="l">
               <a:lnSpc>
-                <a:spcPct val="115000"/>
+                <a:spcPct val="110000"/>
               </a:lnSpc>
             </a:pPr>
             <a:r>
-              <a:rPr sz="950" b="1">
-                <a:solidFill>
-                  <a:srgbClr val="6E6E73"/>
-                </a:solidFill>
-                <a:latin typeface="맑은 고딕"/>
-                <a:ea typeface="맑은 고딕"/>
-                <a:cs typeface="맑은 고딕"/>
-              </a:rPr>
-              <a:t>Aramirror</a:t>
-            </a:r>
-            <a:r>
-              <a:rPr sz="950" b="0">
-                <a:solidFill>
-                  <a:srgbClr val="6E6E73"/>
-                </a:solidFill>
-                <a:latin typeface="맑은 고딕"/>
-                <a:ea typeface="맑은 고딕"/>
-                <a:cs typeface="맑은 고딕"/>
-              </a:rPr>
-              <a:t>  —  AI는 거울이 된다</a:t>
-            </a:r>
-          </a:p>
-        </p:txBody>
-      </p:sp>
-      <p:sp>
-        <p:nvSpPr>
-          <p:cNvPr id="11" name="TextBox 10"/>
+              <a:rPr sz="2400" b="1">
+                <a:solidFill>
+                  <a:srgbClr val="1D1D1F"/>
+                </a:solidFill>
+                <a:latin typeface="Pretendard"/>
+              </a:rPr>
+              <a:t>“기록이 아니라 '승격'이 핵심이다.”</a:t>
+            </a:r>
+          </a:p>
+        </p:txBody>
+      </p:sp>
+      <p:sp>
+        <p:nvSpPr>
+          <p:cNvPr id="8" name="TextBox 7"/>
           <p:cNvSpPr txBox="1"/>
           <p:nvPr/>
         </p:nvSpPr>
         <p:spPr>
           <a:xfrm>
-            <a:off x="9494215" y="6236208"/>
-            <a:ext cx="1828800" cy="365760"/>
+            <a:off x="877824" y="5230368"/>
+            <a:ext cx="10436047" cy="731520"/>
           </a:xfrm>
           <a:prstGeom prst="rect">
             <a:avLst/>
@@ -6236,21 +6830,141 @@
           </a:bodyPr>
           <a:lstStyle/>
           <a:p>
+            <a:pPr algn="l">
+              <a:lnSpc>
+                <a:spcPct val="110000"/>
+              </a:lnSpc>
+            </a:pPr>
+            <a:r>
+              <a:rPr sz="1300" b="0">
+                <a:solidFill>
+                  <a:srgbClr val="6E6E73"/>
+                </a:solidFill>
+                <a:latin typeface="Pretendard"/>
+              </a:rPr>
+              <a:t>그리고 — 강의를 들었다가 아니라 '그날 바로 하나 만들었다'가 남는다. 배움도 그날 재활용해야 자산이 된다.</a:t>
+            </a:r>
+          </a:p>
+        </p:txBody>
+      </p:sp>
+      <p:cxnSp>
+        <p:nvCxnSpPr>
+          <p:cNvPr id="9" name="Connector 8"/>
+          <p:cNvCxnSpPr/>
+          <p:nvPr/>
+        </p:nvCxnSpPr>
+        <p:spPr>
+          <a:xfrm>
+            <a:off x="877824" y="6263640"/>
+            <a:ext cx="10436047" cy="0"/>
+          </a:xfrm>
+          <a:prstGeom prst="bentConnector3">
+            <a:avLst/>
+          </a:prstGeom>
+          <a:ln w="9525">
+            <a:solidFill>
+              <a:srgbClr val="D2D2D7"/>
+            </a:solidFill>
+          </a:ln>
+        </p:spPr>
+        <p:style>
+          <a:lnRef idx="2">
+            <a:schemeClr val="accent1"/>
+          </a:lnRef>
+          <a:fillRef idx="0">
+            <a:schemeClr val="accent1"/>
+          </a:fillRef>
+          <a:effectRef idx="1">
+            <a:schemeClr val="accent1"/>
+          </a:effectRef>
+          <a:fontRef idx="minor">
+            <a:schemeClr val="tx1"/>
+          </a:fontRef>
+        </p:style>
+      </p:cxnSp>
+      <p:sp>
+        <p:nvSpPr>
+          <p:cNvPr id="10" name="TextBox 9"/>
+          <p:cNvSpPr txBox="1"/>
+          <p:nvPr/>
+        </p:nvSpPr>
+        <p:spPr>
+          <a:xfrm>
+            <a:off x="877824" y="6355080"/>
+            <a:ext cx="10436047" cy="320040"/>
+          </a:xfrm>
+          <a:prstGeom prst="rect">
+            <a:avLst/>
+          </a:prstGeom>
+          <a:noFill/>
+        </p:spPr>
+        <p:txBody>
+          <a:bodyPr wrap="square" anchor="t" lIns="0" rIns="0" tIns="0" bIns="0">
+            <a:spAutoFit/>
+          </a:bodyPr>
+          <a:lstStyle/>
+          <a:p>
+            <a:pPr algn="l">
+              <a:lnSpc>
+                <a:spcPct val="110000"/>
+              </a:lnSpc>
+            </a:pPr>
+            <a:r>
+              <a:rPr sz="900" b="1">
+                <a:solidFill>
+                  <a:srgbClr val="6E6E73"/>
+                </a:solidFill>
+                <a:latin typeface="Pretendard"/>
+              </a:rPr>
+              <a:t>Aramirror</a:t>
+            </a:r>
+            <a:r>
+              <a:rPr sz="900" b="0">
+                <a:solidFill>
+                  <a:srgbClr val="6E6E73"/>
+                </a:solidFill>
+                <a:latin typeface="Pretendard"/>
+              </a:rPr>
+              <a:t>  — AI는 거울이 된다</a:t>
+            </a:r>
+          </a:p>
+        </p:txBody>
+      </p:sp>
+      <p:sp>
+        <p:nvSpPr>
+          <p:cNvPr id="11" name="TextBox 10"/>
+          <p:cNvSpPr txBox="1"/>
+          <p:nvPr/>
+        </p:nvSpPr>
+        <p:spPr>
+          <a:xfrm>
+            <a:off x="877824" y="6355080"/>
+            <a:ext cx="10436047" cy="320040"/>
+          </a:xfrm>
+          <a:prstGeom prst="rect">
+            <a:avLst/>
+          </a:prstGeom>
+          <a:noFill/>
+        </p:spPr>
+        <p:txBody>
+          <a:bodyPr wrap="square" anchor="t" lIns="0" rIns="0" tIns="0" bIns="0">
+            <a:spAutoFit/>
+          </a:bodyPr>
+          <a:lstStyle/>
+          <a:p>
             <a:pPr algn="r">
               <a:lnSpc>
-                <a:spcPct val="115000"/>
+                <a:spcPct val="110000"/>
               </a:lnSpc>
             </a:pPr>
             <a:r>
-              <a:rPr sz="950" b="0">
+              <a:rPr sz="900" b="0">
                 <a:solidFill>
                   <a:srgbClr val="6E6E73"/>
                 </a:solidFill>
-                <a:latin typeface="맑은 고딕"/>
-                <a:ea typeface="맑은 고딕"/>
-                <a:cs typeface="맑은 고딕"/>
-              </a:rPr>
-              <a:t>05 / 05</a:t>
+                <a:latin typeface="Pretendard"/>
+              </a:rPr>
+              <a:t>07 / 07</a:t>
             </a:r>
           </a:p>
         </p:txBody>
